--- a/koreatech-db/weeks/14주차_경영_데이터_SQL_종합_실습.pptx
+++ b/koreatech-db/weeks/14주차_경영_데이터_SQL_종합_실습.pptx
@@ -4171,9 +4171,9 @@
                 <a:solidFill>
                   <a:srgbClr val="7A869C"/>
                 </a:solidFill>
-                <a:latin typeface="나눔고딕코딩"/>
-                <a:ea typeface="나눔고딕코딩"/>
-                <a:cs typeface="나눔고딕코딩"/>
+                <a:latin typeface="D2Coding"/>
+                <a:ea typeface="D2Coding"/>
+                <a:cs typeface="D2Coding"/>
               </a:rPr>
               <a:t>1</a:t>
             </a:r>
@@ -4189,9 +4189,9 @@
                 <a:solidFill>
                   <a:srgbClr val="7A869C"/>
                 </a:solidFill>
-                <a:latin typeface="나눔고딕코딩"/>
-                <a:ea typeface="나눔고딕코딩"/>
-                <a:cs typeface="나눔고딕코딩"/>
+                <a:latin typeface="D2Coding"/>
+                <a:ea typeface="D2Coding"/>
+                <a:cs typeface="D2Coding"/>
               </a:rPr>
               <a:t>2</a:t>
             </a:r>
@@ -4207,9 +4207,9 @@
                 <a:solidFill>
                   <a:srgbClr val="7A869C"/>
                 </a:solidFill>
-                <a:latin typeface="나눔고딕코딩"/>
-                <a:ea typeface="나눔고딕코딩"/>
-                <a:cs typeface="나눔고딕코딩"/>
+                <a:latin typeface="D2Coding"/>
+                <a:ea typeface="D2Coding"/>
+                <a:cs typeface="D2Coding"/>
               </a:rPr>
               <a:t>3</a:t>
             </a:r>
@@ -4225,9 +4225,9 @@
                 <a:solidFill>
                   <a:srgbClr val="7A869C"/>
                 </a:solidFill>
-                <a:latin typeface="나눔고딕코딩"/>
-                <a:ea typeface="나눔고딕코딩"/>
-                <a:cs typeface="나눔고딕코딩"/>
+                <a:latin typeface="D2Coding"/>
+                <a:ea typeface="D2Coding"/>
+                <a:cs typeface="D2Coding"/>
               </a:rPr>
               <a:t>4</a:t>
             </a:r>
@@ -4243,9 +4243,9 @@
                 <a:solidFill>
                   <a:srgbClr val="7A869C"/>
                 </a:solidFill>
-                <a:latin typeface="나눔고딕코딩"/>
-                <a:ea typeface="나눔고딕코딩"/>
-                <a:cs typeface="나눔고딕코딩"/>
+                <a:latin typeface="D2Coding"/>
+                <a:ea typeface="D2Coding"/>
+                <a:cs typeface="D2Coding"/>
               </a:rPr>
               <a:t>5</a:t>
             </a:r>
@@ -4261,9 +4261,9 @@
                 <a:solidFill>
                   <a:srgbClr val="7A869C"/>
                 </a:solidFill>
-                <a:latin typeface="나눔고딕코딩"/>
-                <a:ea typeface="나눔고딕코딩"/>
-                <a:cs typeface="나눔고딕코딩"/>
+                <a:latin typeface="D2Coding"/>
+                <a:ea typeface="D2Coding"/>
+                <a:cs typeface="D2Coding"/>
               </a:rPr>
               <a:t>6</a:t>
             </a:r>
@@ -4279,9 +4279,9 @@
                 <a:solidFill>
                   <a:srgbClr val="7A869C"/>
                 </a:solidFill>
-                <a:latin typeface="나눔고딕코딩"/>
-                <a:ea typeface="나눔고딕코딩"/>
-                <a:cs typeface="나눔고딕코딩"/>
+                <a:latin typeface="D2Coding"/>
+                <a:ea typeface="D2Coding"/>
+                <a:cs typeface="D2Coding"/>
               </a:rPr>
               <a:t>7</a:t>
             </a:r>
@@ -4297,9 +4297,9 @@
                 <a:solidFill>
                   <a:srgbClr val="7A869C"/>
                 </a:solidFill>
-                <a:latin typeface="나눔고딕코딩"/>
-                <a:ea typeface="나눔고딕코딩"/>
-                <a:cs typeface="나눔고딕코딩"/>
+                <a:latin typeface="D2Coding"/>
+                <a:ea typeface="D2Coding"/>
+                <a:cs typeface="D2Coding"/>
               </a:rPr>
               <a:t>8</a:t>
             </a:r>
@@ -4315,9 +4315,9 @@
                 <a:solidFill>
                   <a:srgbClr val="7A869C"/>
                 </a:solidFill>
-                <a:latin typeface="나눔고딕코딩"/>
-                <a:ea typeface="나눔고딕코딩"/>
-                <a:cs typeface="나눔고딕코딩"/>
+                <a:latin typeface="D2Coding"/>
+                <a:ea typeface="D2Coding"/>
+                <a:cs typeface="D2Coding"/>
               </a:rPr>
               <a:t>9</a:t>
             </a:r>
@@ -4356,9 +4356,9 @@
                 <a:solidFill>
                   <a:srgbClr val="E6EAF2"/>
                 </a:solidFill>
-                <a:latin typeface="나눔고딕코딩"/>
-                <a:ea typeface="나눔고딕코딩"/>
-                <a:cs typeface="나눔고딕코딩"/>
+                <a:latin typeface="D2Coding"/>
+                <a:ea typeface="D2Coding"/>
+                <a:cs typeface="D2Coding"/>
               </a:rPr>
               <a:t>SELECT c.cust_id, c.name, c.grade, c.email</a:t>
             </a:r>
@@ -4374,9 +4374,9 @@
                 <a:solidFill>
                   <a:srgbClr val="E6EAF2"/>
                 </a:solidFill>
-                <a:latin typeface="나눔고딕코딩"/>
-                <a:ea typeface="나눔고딕코딩"/>
-                <a:cs typeface="나눔고딕코딩"/>
+                <a:latin typeface="D2Coding"/>
+                <a:ea typeface="D2Coding"/>
+                <a:cs typeface="D2Coding"/>
               </a:rPr>
               <a:t>FROM   customers c</a:t>
             </a:r>
@@ -4392,9 +4392,9 @@
                 <a:solidFill>
                   <a:srgbClr val="E6EAF2"/>
                 </a:solidFill>
-                <a:latin typeface="나눔고딕코딩"/>
-                <a:ea typeface="나눔고딕코딩"/>
-                <a:cs typeface="나눔고딕코딩"/>
+                <a:latin typeface="D2Coding"/>
+                <a:ea typeface="D2Coding"/>
+                <a:cs typeface="D2Coding"/>
               </a:rPr>
               <a:t>WHERE  NOT EXISTS (</a:t>
             </a:r>
@@ -4410,9 +4410,9 @@
                 <a:solidFill>
                   <a:srgbClr val="E6EAF2"/>
                 </a:solidFill>
-                <a:latin typeface="나눔고딕코딩"/>
-                <a:ea typeface="나눔고딕코딩"/>
-                <a:cs typeface="나눔고딕코딩"/>
+                <a:latin typeface="D2Coding"/>
+                <a:ea typeface="D2Coding"/>
+                <a:cs typeface="D2Coding"/>
               </a:rPr>
               <a:t>  SELECT 1</a:t>
             </a:r>
@@ -4428,9 +4428,9 @@
                 <a:solidFill>
                   <a:srgbClr val="E6EAF2"/>
                 </a:solidFill>
-                <a:latin typeface="나눔고딕코딩"/>
-                <a:ea typeface="나눔고딕코딩"/>
-                <a:cs typeface="나눔고딕코딩"/>
+                <a:latin typeface="D2Coding"/>
+                <a:ea typeface="D2Coding"/>
+                <a:cs typeface="D2Coding"/>
               </a:rPr>
               <a:t>  FROM   orders o</a:t>
             </a:r>
@@ -4446,9 +4446,9 @@
                 <a:solidFill>
                   <a:srgbClr val="E6EAF2"/>
                 </a:solidFill>
-                <a:latin typeface="나눔고딕코딩"/>
-                <a:ea typeface="나눔고딕코딩"/>
-                <a:cs typeface="나눔고딕코딩"/>
+                <a:latin typeface="D2Coding"/>
+                <a:ea typeface="D2Coding"/>
+                <a:cs typeface="D2Coding"/>
               </a:rPr>
               <a:t>  WHERE  o.cust_id = c.cust_id</a:t>
             </a:r>
@@ -4464,9 +4464,9 @@
                 <a:solidFill>
                   <a:srgbClr val="E6EAF2"/>
                 </a:solidFill>
-                <a:latin typeface="나눔고딕코딩"/>
-                <a:ea typeface="나눔고딕코딩"/>
-                <a:cs typeface="나눔고딕코딩"/>
+                <a:latin typeface="D2Coding"/>
+                <a:ea typeface="D2Coding"/>
+                <a:cs typeface="D2Coding"/>
               </a:rPr>
               <a:t>    AND  o.status &lt;&gt; '취소'</a:t>
             </a:r>
@@ -4482,9 +4482,9 @@
                 <a:solidFill>
                   <a:srgbClr val="E6EAF2"/>
                 </a:solidFill>
-                <a:latin typeface="나눔고딕코딩"/>
-                <a:ea typeface="나눔고딕코딩"/>
-                <a:cs typeface="나눔고딕코딩"/>
+                <a:latin typeface="D2Coding"/>
+                <a:ea typeface="D2Coding"/>
+                <a:cs typeface="D2Coding"/>
               </a:rPr>
               <a:t>    AND  o.order_date &gt;= DATE_SUB(CURDATE(), INTERVAL 90 DAY)</a:t>
             </a:r>
@@ -4500,9 +4500,9 @@
                 <a:solidFill>
                   <a:srgbClr val="E6EAF2"/>
                 </a:solidFill>
-                <a:latin typeface="나눔고딕코딩"/>
-                <a:ea typeface="나눔고딕코딩"/>
-                <a:cs typeface="나눔고딕코딩"/>
+                <a:latin typeface="D2Coding"/>
+                <a:ea typeface="D2Coding"/>
+                <a:cs typeface="D2Coding"/>
               </a:rPr>
               <a:t>);</a:t>
             </a:r>
@@ -6450,9 +6450,9 @@
                 <a:solidFill>
                   <a:srgbClr val="7A869C"/>
                 </a:solidFill>
-                <a:latin typeface="나눔고딕코딩"/>
-                <a:ea typeface="나눔고딕코딩"/>
-                <a:cs typeface="나눔고딕코딩"/>
+                <a:latin typeface="D2Coding"/>
+                <a:ea typeface="D2Coding"/>
+                <a:cs typeface="D2Coding"/>
               </a:rPr>
               <a:t>1</a:t>
             </a:r>
@@ -6468,9 +6468,9 @@
                 <a:solidFill>
                   <a:srgbClr val="7A869C"/>
                 </a:solidFill>
-                <a:latin typeface="나눔고딕코딩"/>
-                <a:ea typeface="나눔고딕코딩"/>
-                <a:cs typeface="나눔고딕코딩"/>
+                <a:latin typeface="D2Coding"/>
+                <a:ea typeface="D2Coding"/>
+                <a:cs typeface="D2Coding"/>
               </a:rPr>
               <a:t>2</a:t>
             </a:r>
@@ -6486,9 +6486,9 @@
                 <a:solidFill>
                   <a:srgbClr val="7A869C"/>
                 </a:solidFill>
-                <a:latin typeface="나눔고딕코딩"/>
-                <a:ea typeface="나눔고딕코딩"/>
-                <a:cs typeface="나눔고딕코딩"/>
+                <a:latin typeface="D2Coding"/>
+                <a:ea typeface="D2Coding"/>
+                <a:cs typeface="D2Coding"/>
               </a:rPr>
               <a:t>3</a:t>
             </a:r>
@@ -6504,9 +6504,9 @@
                 <a:solidFill>
                   <a:srgbClr val="7A869C"/>
                 </a:solidFill>
-                <a:latin typeface="나눔고딕코딩"/>
-                <a:ea typeface="나눔고딕코딩"/>
-                <a:cs typeface="나눔고딕코딩"/>
+                <a:latin typeface="D2Coding"/>
+                <a:ea typeface="D2Coding"/>
+                <a:cs typeface="D2Coding"/>
               </a:rPr>
               <a:t>4</a:t>
             </a:r>
@@ -6522,9 +6522,9 @@
                 <a:solidFill>
                   <a:srgbClr val="7A869C"/>
                 </a:solidFill>
-                <a:latin typeface="나눔고딕코딩"/>
-                <a:ea typeface="나눔고딕코딩"/>
-                <a:cs typeface="나눔고딕코딩"/>
+                <a:latin typeface="D2Coding"/>
+                <a:ea typeface="D2Coding"/>
+                <a:cs typeface="D2Coding"/>
               </a:rPr>
               <a:t>5</a:t>
             </a:r>
@@ -6540,9 +6540,9 @@
                 <a:solidFill>
                   <a:srgbClr val="7A869C"/>
                 </a:solidFill>
-                <a:latin typeface="나눔고딕코딩"/>
-                <a:ea typeface="나눔고딕코딩"/>
-                <a:cs typeface="나눔고딕코딩"/>
+                <a:latin typeface="D2Coding"/>
+                <a:ea typeface="D2Coding"/>
+                <a:cs typeface="D2Coding"/>
               </a:rPr>
               <a:t>6</a:t>
             </a:r>
@@ -6558,9 +6558,9 @@
                 <a:solidFill>
                   <a:srgbClr val="7A869C"/>
                 </a:solidFill>
-                <a:latin typeface="나눔고딕코딩"/>
-                <a:ea typeface="나눔고딕코딩"/>
-                <a:cs typeface="나눔고딕코딩"/>
+                <a:latin typeface="D2Coding"/>
+                <a:ea typeface="D2Coding"/>
+                <a:cs typeface="D2Coding"/>
               </a:rPr>
               <a:t>7</a:t>
             </a:r>
@@ -6576,9 +6576,9 @@
                 <a:solidFill>
                   <a:srgbClr val="7A869C"/>
                 </a:solidFill>
-                <a:latin typeface="나눔고딕코딩"/>
-                <a:ea typeface="나눔고딕코딩"/>
-                <a:cs typeface="나눔고딕코딩"/>
+                <a:latin typeface="D2Coding"/>
+                <a:ea typeface="D2Coding"/>
+                <a:cs typeface="D2Coding"/>
               </a:rPr>
               <a:t>8</a:t>
             </a:r>
@@ -6594,9 +6594,9 @@
                 <a:solidFill>
                   <a:srgbClr val="7A869C"/>
                 </a:solidFill>
-                <a:latin typeface="나눔고딕코딩"/>
-                <a:ea typeface="나눔고딕코딩"/>
-                <a:cs typeface="나눔고딕코딩"/>
+                <a:latin typeface="D2Coding"/>
+                <a:ea typeface="D2Coding"/>
+                <a:cs typeface="D2Coding"/>
               </a:rPr>
               <a:t>9</a:t>
             </a:r>
@@ -6612,9 +6612,9 @@
                 <a:solidFill>
                   <a:srgbClr val="7A869C"/>
                 </a:solidFill>
-                <a:latin typeface="나눔고딕코딩"/>
-                <a:ea typeface="나눔고딕코딩"/>
-                <a:cs typeface="나눔고딕코딩"/>
+                <a:latin typeface="D2Coding"/>
+                <a:ea typeface="D2Coding"/>
+                <a:cs typeface="D2Coding"/>
               </a:rPr>
               <a:t>10</a:t>
             </a:r>
@@ -6653,9 +6653,9 @@
                 <a:solidFill>
                   <a:srgbClr val="E6EAF2"/>
                 </a:solidFill>
-                <a:latin typeface="나눔고딕코딩"/>
-                <a:ea typeface="나눔고딕코딩"/>
-                <a:cs typeface="나눔고딕코딩"/>
+                <a:latin typeface="D2Coding"/>
+                <a:ea typeface="D2Coding"/>
+                <a:cs typeface="D2Coding"/>
               </a:rPr>
               <a:t>SELECT c.cust_id, c.name,</a:t>
             </a:r>
@@ -6671,9 +6671,9 @@
                 <a:solidFill>
                   <a:srgbClr val="E6EAF2"/>
                 </a:solidFill>
-                <a:latin typeface="나눔고딕코딩"/>
-                <a:ea typeface="나눔고딕코딩"/>
-                <a:cs typeface="나눔고딕코딩"/>
+                <a:latin typeface="D2Coding"/>
+                <a:ea typeface="D2Coding"/>
+                <a:cs typeface="D2Coding"/>
               </a:rPr>
               <a:t>       SUM(i.qty * i.unit_price) AS 누적결제액</a:t>
             </a:r>
@@ -6689,9 +6689,9 @@
                 <a:solidFill>
                   <a:srgbClr val="E6EAF2"/>
                 </a:solidFill>
-                <a:latin typeface="나눔고딕코딩"/>
-                <a:ea typeface="나눔고딕코딩"/>
-                <a:cs typeface="나눔고딕코딩"/>
+                <a:latin typeface="D2Coding"/>
+                <a:ea typeface="D2Coding"/>
+                <a:cs typeface="D2Coding"/>
               </a:rPr>
               <a:t>FROM   customers c</a:t>
             </a:r>
@@ -6707,9 +6707,9 @@
                 <a:solidFill>
                   <a:srgbClr val="E6EAF2"/>
                 </a:solidFill>
-                <a:latin typeface="나눔고딕코딩"/>
-                <a:ea typeface="나눔고딕코딩"/>
-                <a:cs typeface="나눔고딕코딩"/>
+                <a:latin typeface="D2Coding"/>
+                <a:ea typeface="D2Coding"/>
+                <a:cs typeface="D2Coding"/>
               </a:rPr>
               <a:t>JOIN   orders      o ON c.cust_id  = o.cust_id</a:t>
             </a:r>
@@ -6725,9 +6725,9 @@
                 <a:solidFill>
                   <a:srgbClr val="E6EAF2"/>
                 </a:solidFill>
-                <a:latin typeface="나눔고딕코딩"/>
-                <a:ea typeface="나눔고딕코딩"/>
-                <a:cs typeface="나눔고딕코딩"/>
+                <a:latin typeface="D2Coding"/>
+                <a:ea typeface="D2Coding"/>
+                <a:cs typeface="D2Coding"/>
               </a:rPr>
               <a:t>JOIN   order_items i ON o.order_id = i.order_id</a:t>
             </a:r>
@@ -6743,9 +6743,9 @@
                 <a:solidFill>
                   <a:srgbClr val="E6EAF2"/>
                 </a:solidFill>
-                <a:latin typeface="나눔고딕코딩"/>
-                <a:ea typeface="나눔고딕코딩"/>
-                <a:cs typeface="나눔고딕코딩"/>
+                <a:latin typeface="D2Coding"/>
+                <a:ea typeface="D2Coding"/>
+                <a:cs typeface="D2Coding"/>
               </a:rPr>
               <a:t>WHERE  c.grade = 'SILVER'</a:t>
             </a:r>
@@ -6761,9 +6761,9 @@
                 <a:solidFill>
                   <a:srgbClr val="E6EAF2"/>
                 </a:solidFill>
-                <a:latin typeface="나눔고딕코딩"/>
-                <a:ea typeface="나눔고딕코딩"/>
-                <a:cs typeface="나눔고딕코딩"/>
+                <a:latin typeface="D2Coding"/>
+                <a:ea typeface="D2Coding"/>
+                <a:cs typeface="D2Coding"/>
               </a:rPr>
               <a:t>  AND  o.status &lt;&gt; '취소'</a:t>
             </a:r>
@@ -6779,9 +6779,9 @@
                 <a:solidFill>
                   <a:srgbClr val="E6EAF2"/>
                 </a:solidFill>
-                <a:latin typeface="나눔고딕코딩"/>
-                <a:ea typeface="나눔고딕코딩"/>
-                <a:cs typeface="나눔고딕코딩"/>
+                <a:latin typeface="D2Coding"/>
+                <a:ea typeface="D2Coding"/>
+                <a:cs typeface="D2Coding"/>
               </a:rPr>
               <a:t>GROUP  BY c.cust_id, c.name</a:t>
             </a:r>
@@ -6797,9 +6797,9 @@
                 <a:solidFill>
                   <a:srgbClr val="E6EAF2"/>
                 </a:solidFill>
-                <a:latin typeface="나눔고딕코딩"/>
-                <a:ea typeface="나눔고딕코딩"/>
-                <a:cs typeface="나눔고딕코딩"/>
+                <a:latin typeface="D2Coding"/>
+                <a:ea typeface="D2Coding"/>
+                <a:cs typeface="D2Coding"/>
               </a:rPr>
               <a:t>HAVING SUM(i.qty * i.unit_price) &gt;= 50000;</a:t>
             </a:r>
@@ -6815,9 +6815,9 @@
                 <a:solidFill>
                   <a:srgbClr val="E6EAF2"/>
                 </a:solidFill>
-                <a:latin typeface="나눔고딕코딩"/>
-                <a:ea typeface="나눔고딕코딩"/>
-                <a:cs typeface="나눔고딕코딩"/>
+                <a:latin typeface="D2Coding"/>
+                <a:ea typeface="D2Coding"/>
+                <a:cs typeface="D2Coding"/>
               </a:rPr>
               <a:t>--  C005 | 박서연 | 57800</a:t>
             </a:r>
@@ -8449,9 +8449,9 @@
                 <a:solidFill>
                   <a:srgbClr val="7A869C"/>
                 </a:solidFill>
-                <a:latin typeface="나눔고딕코딩"/>
-                <a:ea typeface="나눔고딕코딩"/>
-                <a:cs typeface="나눔고딕코딩"/>
+                <a:latin typeface="D2Coding"/>
+                <a:ea typeface="D2Coding"/>
+                <a:cs typeface="D2Coding"/>
               </a:rPr>
               <a:t>1</a:t>
             </a:r>
@@ -8467,9 +8467,9 @@
                 <a:solidFill>
                   <a:srgbClr val="7A869C"/>
                 </a:solidFill>
-                <a:latin typeface="나눔고딕코딩"/>
-                <a:ea typeface="나눔고딕코딩"/>
-                <a:cs typeface="나눔고딕코딩"/>
+                <a:latin typeface="D2Coding"/>
+                <a:ea typeface="D2Coding"/>
+                <a:cs typeface="D2Coding"/>
               </a:rPr>
               <a:t>2</a:t>
             </a:r>
@@ -8485,9 +8485,9 @@
                 <a:solidFill>
                   <a:srgbClr val="7A869C"/>
                 </a:solidFill>
-                <a:latin typeface="나눔고딕코딩"/>
-                <a:ea typeface="나눔고딕코딩"/>
-                <a:cs typeface="나눔고딕코딩"/>
+                <a:latin typeface="D2Coding"/>
+                <a:ea typeface="D2Coding"/>
+                <a:cs typeface="D2Coding"/>
               </a:rPr>
               <a:t>3</a:t>
             </a:r>
@@ -8503,9 +8503,9 @@
                 <a:solidFill>
                   <a:srgbClr val="7A869C"/>
                 </a:solidFill>
-                <a:latin typeface="나눔고딕코딩"/>
-                <a:ea typeface="나눔고딕코딩"/>
-                <a:cs typeface="나눔고딕코딩"/>
+                <a:latin typeface="D2Coding"/>
+                <a:ea typeface="D2Coding"/>
+                <a:cs typeface="D2Coding"/>
               </a:rPr>
               <a:t>4</a:t>
             </a:r>
@@ -8521,9 +8521,9 @@
                 <a:solidFill>
                   <a:srgbClr val="7A869C"/>
                 </a:solidFill>
-                <a:latin typeface="나눔고딕코딩"/>
-                <a:ea typeface="나눔고딕코딩"/>
-                <a:cs typeface="나눔고딕코딩"/>
+                <a:latin typeface="D2Coding"/>
+                <a:ea typeface="D2Coding"/>
+                <a:cs typeface="D2Coding"/>
               </a:rPr>
               <a:t>5</a:t>
             </a:r>
@@ -8539,9 +8539,9 @@
                 <a:solidFill>
                   <a:srgbClr val="7A869C"/>
                 </a:solidFill>
-                <a:latin typeface="나눔고딕코딩"/>
-                <a:ea typeface="나눔고딕코딩"/>
-                <a:cs typeface="나눔고딕코딩"/>
+                <a:latin typeface="D2Coding"/>
+                <a:ea typeface="D2Coding"/>
+                <a:cs typeface="D2Coding"/>
               </a:rPr>
               <a:t>6</a:t>
             </a:r>
@@ -8557,9 +8557,9 @@
                 <a:solidFill>
                   <a:srgbClr val="7A869C"/>
                 </a:solidFill>
-                <a:latin typeface="나눔고딕코딩"/>
-                <a:ea typeface="나눔고딕코딩"/>
-                <a:cs typeface="나눔고딕코딩"/>
+                <a:latin typeface="D2Coding"/>
+                <a:ea typeface="D2Coding"/>
+                <a:cs typeface="D2Coding"/>
               </a:rPr>
               <a:t>7</a:t>
             </a:r>
@@ -8575,9 +8575,9 @@
                 <a:solidFill>
                   <a:srgbClr val="7A869C"/>
                 </a:solidFill>
-                <a:latin typeface="나눔고딕코딩"/>
-                <a:ea typeface="나눔고딕코딩"/>
-                <a:cs typeface="나눔고딕코딩"/>
+                <a:latin typeface="D2Coding"/>
+                <a:ea typeface="D2Coding"/>
+                <a:cs typeface="D2Coding"/>
               </a:rPr>
               <a:t>8</a:t>
             </a:r>
@@ -8593,9 +8593,9 @@
                 <a:solidFill>
                   <a:srgbClr val="7A869C"/>
                 </a:solidFill>
-                <a:latin typeface="나눔고딕코딩"/>
-                <a:ea typeface="나눔고딕코딩"/>
-                <a:cs typeface="나눔고딕코딩"/>
+                <a:latin typeface="D2Coding"/>
+                <a:ea typeface="D2Coding"/>
+                <a:cs typeface="D2Coding"/>
               </a:rPr>
               <a:t>9</a:t>
             </a:r>
@@ -8611,9 +8611,9 @@
                 <a:solidFill>
                   <a:srgbClr val="7A869C"/>
                 </a:solidFill>
-                <a:latin typeface="나눔고딕코딩"/>
-                <a:ea typeface="나눔고딕코딩"/>
-                <a:cs typeface="나눔고딕코딩"/>
+                <a:latin typeface="D2Coding"/>
+                <a:ea typeface="D2Coding"/>
+                <a:cs typeface="D2Coding"/>
               </a:rPr>
               <a:t>10</a:t>
             </a:r>
@@ -8629,9 +8629,9 @@
                 <a:solidFill>
                   <a:srgbClr val="7A869C"/>
                 </a:solidFill>
-                <a:latin typeface="나눔고딕코딩"/>
-                <a:ea typeface="나눔고딕코딩"/>
-                <a:cs typeface="나눔고딕코딩"/>
+                <a:latin typeface="D2Coding"/>
+                <a:ea typeface="D2Coding"/>
+                <a:cs typeface="D2Coding"/>
               </a:rPr>
               <a:t>11</a:t>
             </a:r>
@@ -8670,9 +8670,9 @@
                 <a:solidFill>
                   <a:srgbClr val="E6EAF2"/>
                 </a:solidFill>
-                <a:latin typeface="나눔고딕코딩"/>
-                <a:ea typeface="나눔고딕코딩"/>
-                <a:cs typeface="나눔고딕코딩"/>
+                <a:latin typeface="D2Coding"/>
+                <a:ea typeface="D2Coding"/>
+                <a:cs typeface="D2Coding"/>
               </a:rPr>
               <a:t>SELECT YEAR(joined_date) AS 가입연도,</a:t>
             </a:r>
@@ -8688,9 +8688,9 @@
                 <a:solidFill>
                   <a:srgbClr val="E6EAF2"/>
                 </a:solidFill>
-                <a:latin typeface="나눔고딕코딩"/>
-                <a:ea typeface="나눔고딕코딩"/>
-                <a:cs typeface="나눔고딕코딩"/>
+                <a:latin typeface="D2Coding"/>
+                <a:ea typeface="D2Coding"/>
+                <a:cs typeface="D2Coding"/>
               </a:rPr>
               <a:t>       COUNT(*)          AS 신규가입</a:t>
             </a:r>
@@ -8706,9 +8706,9 @@
                 <a:solidFill>
                   <a:srgbClr val="E6EAF2"/>
                 </a:solidFill>
-                <a:latin typeface="나눔고딕코딩"/>
-                <a:ea typeface="나눔고딕코딩"/>
-                <a:cs typeface="나눔고딕코딩"/>
+                <a:latin typeface="D2Coding"/>
+                <a:ea typeface="D2Coding"/>
+                <a:cs typeface="D2Coding"/>
               </a:rPr>
               <a:t>FROM   customers</a:t>
             </a:r>
@@ -8724,9 +8724,9 @@
                 <a:solidFill>
                   <a:srgbClr val="E6EAF2"/>
                 </a:solidFill>
-                <a:latin typeface="나눔고딕코딩"/>
-                <a:ea typeface="나눔고딕코딩"/>
-                <a:cs typeface="나눔고딕코딩"/>
+                <a:latin typeface="D2Coding"/>
+                <a:ea typeface="D2Coding"/>
+                <a:cs typeface="D2Coding"/>
               </a:rPr>
               <a:t>GROUP  BY YEAR(joined_date)</a:t>
             </a:r>
@@ -8742,9 +8742,9 @@
                 <a:solidFill>
                   <a:srgbClr val="E6EAF2"/>
                 </a:solidFill>
-                <a:latin typeface="나눔고딕코딩"/>
-                <a:ea typeface="나눔고딕코딩"/>
-                <a:cs typeface="나눔고딕코딩"/>
+                <a:latin typeface="D2Coding"/>
+                <a:ea typeface="D2Coding"/>
+                <a:cs typeface="D2Coding"/>
               </a:rPr>
               <a:t>ORDER  BY 가입연도;</a:t>
             </a:r>
@@ -8760,9 +8760,9 @@
                 <a:solidFill>
                   <a:srgbClr val="E6EAF2"/>
                 </a:solidFill>
-                <a:latin typeface="나눔고딕코딩"/>
-                <a:ea typeface="나눔고딕코딩"/>
-                <a:cs typeface="나눔고딕코딩"/>
+                <a:latin typeface="D2Coding"/>
+                <a:ea typeface="D2Coding"/>
+                <a:cs typeface="D2Coding"/>
               </a:rPr>
               <a:t>/*</a:t>
             </a:r>
@@ -8778,9 +8778,9 @@
                 <a:solidFill>
                   <a:srgbClr val="E6EAF2"/>
                 </a:solidFill>
-                <a:latin typeface="나눔고딕코딩"/>
-                <a:ea typeface="나눔고딕코딩"/>
-                <a:cs typeface="나눔고딕코딩"/>
+                <a:latin typeface="D2Coding"/>
+                <a:ea typeface="D2Coding"/>
+                <a:cs typeface="D2Coding"/>
               </a:rPr>
               <a:t> 2023 | 1</a:t>
             </a:r>
@@ -8796,9 +8796,9 @@
                 <a:solidFill>
                   <a:srgbClr val="E6EAF2"/>
                 </a:solidFill>
-                <a:latin typeface="나눔고딕코딩"/>
-                <a:ea typeface="나눔고딕코딩"/>
-                <a:cs typeface="나눔고딕코딩"/>
+                <a:latin typeface="D2Coding"/>
+                <a:ea typeface="D2Coding"/>
+                <a:cs typeface="D2Coding"/>
               </a:rPr>
               <a:t> 2024 | 3</a:t>
             </a:r>
@@ -8814,9 +8814,9 @@
                 <a:solidFill>
                   <a:srgbClr val="E6EAF2"/>
                 </a:solidFill>
-                <a:latin typeface="나눔고딕코딩"/>
-                <a:ea typeface="나눔고딕코딩"/>
-                <a:cs typeface="나눔고딕코딩"/>
+                <a:latin typeface="D2Coding"/>
+                <a:ea typeface="D2Coding"/>
+                <a:cs typeface="D2Coding"/>
               </a:rPr>
               <a:t> 2025 | 4</a:t>
             </a:r>
@@ -8832,9 +8832,9 @@
                 <a:solidFill>
                   <a:srgbClr val="E6EAF2"/>
                 </a:solidFill>
-                <a:latin typeface="나눔고딕코딩"/>
-                <a:ea typeface="나눔고딕코딩"/>
-                <a:cs typeface="나눔고딕코딩"/>
+                <a:latin typeface="D2Coding"/>
+                <a:ea typeface="D2Coding"/>
+                <a:cs typeface="D2Coding"/>
               </a:rPr>
               <a:t> 2026 | 2</a:t>
             </a:r>
@@ -8850,9 +8850,9 @@
                 <a:solidFill>
                   <a:srgbClr val="E6EAF2"/>
                 </a:solidFill>
-                <a:latin typeface="나눔고딕코딩"/>
-                <a:ea typeface="나눔고딕코딩"/>
-                <a:cs typeface="나눔고딕코딩"/>
+                <a:latin typeface="D2Coding"/>
+                <a:ea typeface="D2Coding"/>
+                <a:cs typeface="D2Coding"/>
               </a:rPr>
               <a:t>*/</a:t>
             </a:r>
@@ -12158,9 +12158,9 @@
                 <a:solidFill>
                   <a:srgbClr val="7A869C"/>
                 </a:solidFill>
-                <a:latin typeface="나눔고딕코딩"/>
-                <a:ea typeface="나눔고딕코딩"/>
-                <a:cs typeface="나눔고딕코딩"/>
+                <a:latin typeface="D2Coding"/>
+                <a:ea typeface="D2Coding"/>
+                <a:cs typeface="D2Coding"/>
               </a:rPr>
               <a:t>1</a:t>
             </a:r>
@@ -12176,9 +12176,9 @@
                 <a:solidFill>
                   <a:srgbClr val="7A869C"/>
                 </a:solidFill>
-                <a:latin typeface="나눔고딕코딩"/>
-                <a:ea typeface="나눔고딕코딩"/>
-                <a:cs typeface="나눔고딕코딩"/>
+                <a:latin typeface="D2Coding"/>
+                <a:ea typeface="D2Coding"/>
+                <a:cs typeface="D2Coding"/>
               </a:rPr>
               <a:t>2</a:t>
             </a:r>
@@ -12194,9 +12194,9 @@
                 <a:solidFill>
                   <a:srgbClr val="7A869C"/>
                 </a:solidFill>
-                <a:latin typeface="나눔고딕코딩"/>
-                <a:ea typeface="나눔고딕코딩"/>
-                <a:cs typeface="나눔고딕코딩"/>
+                <a:latin typeface="D2Coding"/>
+                <a:ea typeface="D2Coding"/>
+                <a:cs typeface="D2Coding"/>
               </a:rPr>
               <a:t>3</a:t>
             </a:r>
@@ -12212,9 +12212,9 @@
                 <a:solidFill>
                   <a:srgbClr val="7A869C"/>
                 </a:solidFill>
-                <a:latin typeface="나눔고딕코딩"/>
-                <a:ea typeface="나눔고딕코딩"/>
-                <a:cs typeface="나눔고딕코딩"/>
+                <a:latin typeface="D2Coding"/>
+                <a:ea typeface="D2Coding"/>
+                <a:cs typeface="D2Coding"/>
               </a:rPr>
               <a:t>4</a:t>
             </a:r>
@@ -12230,9 +12230,9 @@
                 <a:solidFill>
                   <a:srgbClr val="7A869C"/>
                 </a:solidFill>
-                <a:latin typeface="나눔고딕코딩"/>
-                <a:ea typeface="나눔고딕코딩"/>
-                <a:cs typeface="나눔고딕코딩"/>
+                <a:latin typeface="D2Coding"/>
+                <a:ea typeface="D2Coding"/>
+                <a:cs typeface="D2Coding"/>
               </a:rPr>
               <a:t>5</a:t>
             </a:r>
@@ -12248,9 +12248,9 @@
                 <a:solidFill>
                   <a:srgbClr val="7A869C"/>
                 </a:solidFill>
-                <a:latin typeface="나눔고딕코딩"/>
-                <a:ea typeface="나눔고딕코딩"/>
-                <a:cs typeface="나눔고딕코딩"/>
+                <a:latin typeface="D2Coding"/>
+                <a:ea typeface="D2Coding"/>
+                <a:cs typeface="D2Coding"/>
               </a:rPr>
               <a:t>6</a:t>
             </a:r>
@@ -12266,9 +12266,9 @@
                 <a:solidFill>
                   <a:srgbClr val="7A869C"/>
                 </a:solidFill>
-                <a:latin typeface="나눔고딕코딩"/>
-                <a:ea typeface="나눔고딕코딩"/>
-                <a:cs typeface="나눔고딕코딩"/>
+                <a:latin typeface="D2Coding"/>
+                <a:ea typeface="D2Coding"/>
+                <a:cs typeface="D2Coding"/>
               </a:rPr>
               <a:t>7</a:t>
             </a:r>
@@ -12284,9 +12284,9 @@
                 <a:solidFill>
                   <a:srgbClr val="7A869C"/>
                 </a:solidFill>
-                <a:latin typeface="나눔고딕코딩"/>
-                <a:ea typeface="나눔고딕코딩"/>
-                <a:cs typeface="나눔고딕코딩"/>
+                <a:latin typeface="D2Coding"/>
+                <a:ea typeface="D2Coding"/>
+                <a:cs typeface="D2Coding"/>
               </a:rPr>
               <a:t>8</a:t>
             </a:r>
@@ -12325,9 +12325,9 @@
                 <a:solidFill>
                   <a:srgbClr val="E6EAF2"/>
                 </a:solidFill>
-                <a:latin typeface="나눔고딕코딩"/>
-                <a:ea typeface="나눔고딕코딩"/>
-                <a:cs typeface="나눔고딕코딩"/>
+                <a:latin typeface="D2Coding"/>
+                <a:ea typeface="D2Coding"/>
+                <a:cs typeface="D2Coding"/>
               </a:rPr>
               <a:t>SELECT prod_id, name, category, stock</a:t>
             </a:r>
@@ -12343,9 +12343,9 @@
                 <a:solidFill>
                   <a:srgbClr val="E6EAF2"/>
                 </a:solidFill>
-                <a:latin typeface="나눔고딕코딩"/>
-                <a:ea typeface="나눔고딕코딩"/>
-                <a:cs typeface="나눔고딕코딩"/>
+                <a:latin typeface="D2Coding"/>
+                <a:ea typeface="D2Coding"/>
+                <a:cs typeface="D2Coding"/>
               </a:rPr>
               <a:t>FROM   products</a:t>
             </a:r>
@@ -12361,9 +12361,9 @@
                 <a:solidFill>
                   <a:srgbClr val="E6EAF2"/>
                 </a:solidFill>
-                <a:latin typeface="나눔고딕코딩"/>
-                <a:ea typeface="나눔고딕코딩"/>
-                <a:cs typeface="나눔고딕코딩"/>
+                <a:latin typeface="D2Coding"/>
+                <a:ea typeface="D2Coding"/>
+                <a:cs typeface="D2Coding"/>
               </a:rPr>
               <a:t>WHERE  stock &lt; 10</a:t>
             </a:r>
@@ -12379,9 +12379,9 @@
                 <a:solidFill>
                   <a:srgbClr val="E6EAF2"/>
                 </a:solidFill>
-                <a:latin typeface="나눔고딕코딩"/>
-                <a:ea typeface="나눔고딕코딩"/>
-                <a:cs typeface="나눔고딕코딩"/>
+                <a:latin typeface="D2Coding"/>
+                <a:ea typeface="D2Coding"/>
+                <a:cs typeface="D2Coding"/>
               </a:rPr>
               <a:t>ORDER  BY stock;</a:t>
             </a:r>
@@ -12397,9 +12397,9 @@
                 <a:solidFill>
                   <a:srgbClr val="E6EAF2"/>
                 </a:solidFill>
-                <a:latin typeface="나눔고딕코딩"/>
-                <a:ea typeface="나눔고딕코딩"/>
-                <a:cs typeface="나눔고딕코딩"/>
+                <a:latin typeface="D2Coding"/>
+                <a:ea typeface="D2Coding"/>
+                <a:cs typeface="D2Coding"/>
               </a:rPr>
               <a:t>/*</a:t>
             </a:r>
@@ -12415,9 +12415,9 @@
                 <a:solidFill>
                   <a:srgbClr val="E6EAF2"/>
                 </a:solidFill>
-                <a:latin typeface="나눔고딕코딩"/>
-                <a:ea typeface="나눔고딕코딩"/>
-                <a:cs typeface="나눔고딕코딩"/>
+                <a:latin typeface="D2Coding"/>
+                <a:ea typeface="D2Coding"/>
+                <a:cs typeface="D2Coding"/>
               </a:rPr>
               <a:t> P004 | 제주 감귤 3kg | 식품 | 0</a:t>
             </a:r>
@@ -12433,9 +12433,9 @@
                 <a:solidFill>
                   <a:srgbClr val="E6EAF2"/>
                 </a:solidFill>
-                <a:latin typeface="나눔고딕코딩"/>
-                <a:ea typeface="나눔고딕코딩"/>
-                <a:cs typeface="나눔고딕코딩"/>
+                <a:latin typeface="D2Coding"/>
+                <a:ea typeface="D2Coding"/>
+                <a:cs typeface="D2Coding"/>
               </a:rPr>
               <a:t> P002 | 공기청정기    | 가전 | 8</a:t>
             </a:r>
@@ -12451,9 +12451,9 @@
                 <a:solidFill>
                   <a:srgbClr val="E6EAF2"/>
                 </a:solidFill>
-                <a:latin typeface="나눔고딕코딩"/>
-                <a:ea typeface="나눔고딕코딩"/>
-                <a:cs typeface="나눔고딕코딩"/>
+                <a:latin typeface="D2Coding"/>
+                <a:ea typeface="D2Coding"/>
+                <a:cs typeface="D2Coding"/>
               </a:rPr>
               <a:t>*/</a:t>
             </a:r>
@@ -14461,9 +14461,9 @@
                 <a:solidFill>
                   <a:srgbClr val="7A869C"/>
                 </a:solidFill>
-                <a:latin typeface="나눔고딕코딩"/>
-                <a:ea typeface="나눔고딕코딩"/>
-                <a:cs typeface="나눔고딕코딩"/>
+                <a:latin typeface="D2Coding"/>
+                <a:ea typeface="D2Coding"/>
+                <a:cs typeface="D2Coding"/>
               </a:rPr>
               <a:t>1</a:t>
             </a:r>
@@ -14479,9 +14479,9 @@
                 <a:solidFill>
                   <a:srgbClr val="7A869C"/>
                 </a:solidFill>
-                <a:latin typeface="나눔고딕코딩"/>
-                <a:ea typeface="나눔고딕코딩"/>
-                <a:cs typeface="나눔고딕코딩"/>
+                <a:latin typeface="D2Coding"/>
+                <a:ea typeface="D2Coding"/>
+                <a:cs typeface="D2Coding"/>
               </a:rPr>
               <a:t>2</a:t>
             </a:r>
@@ -14497,9 +14497,9 @@
                 <a:solidFill>
                   <a:srgbClr val="7A869C"/>
                 </a:solidFill>
-                <a:latin typeface="나눔고딕코딩"/>
-                <a:ea typeface="나눔고딕코딩"/>
-                <a:cs typeface="나눔고딕코딩"/>
+                <a:latin typeface="D2Coding"/>
+                <a:ea typeface="D2Coding"/>
+                <a:cs typeface="D2Coding"/>
               </a:rPr>
               <a:t>3</a:t>
             </a:r>
@@ -14515,9 +14515,9 @@
                 <a:solidFill>
                   <a:srgbClr val="7A869C"/>
                 </a:solidFill>
-                <a:latin typeface="나눔고딕코딩"/>
-                <a:ea typeface="나눔고딕코딩"/>
-                <a:cs typeface="나눔고딕코딩"/>
+                <a:latin typeface="D2Coding"/>
+                <a:ea typeface="D2Coding"/>
+                <a:cs typeface="D2Coding"/>
               </a:rPr>
               <a:t>4</a:t>
             </a:r>
@@ -14533,9 +14533,9 @@
                 <a:solidFill>
                   <a:srgbClr val="7A869C"/>
                 </a:solidFill>
-                <a:latin typeface="나눔고딕코딩"/>
-                <a:ea typeface="나눔고딕코딩"/>
-                <a:cs typeface="나눔고딕코딩"/>
+                <a:latin typeface="D2Coding"/>
+                <a:ea typeface="D2Coding"/>
+                <a:cs typeface="D2Coding"/>
               </a:rPr>
               <a:t>5</a:t>
             </a:r>
@@ -14574,9 +14574,9 @@
                 <a:solidFill>
                   <a:srgbClr val="E6EAF2"/>
                 </a:solidFill>
-                <a:latin typeface="나눔고딕코딩"/>
-                <a:ea typeface="나눔고딕코딩"/>
-                <a:cs typeface="나눔고딕코딩"/>
+                <a:latin typeface="D2Coding"/>
+                <a:ea typeface="D2Coding"/>
+                <a:cs typeface="D2Coding"/>
               </a:rPr>
               <a:t>SELECT COUNT(*)                                        AS 전체주문,</a:t>
             </a:r>
@@ -14592,9 +14592,9 @@
                 <a:solidFill>
                   <a:srgbClr val="E6EAF2"/>
                 </a:solidFill>
-                <a:latin typeface="나눔고딕코딩"/>
-                <a:ea typeface="나눔고딕코딩"/>
-                <a:cs typeface="나눔고딕코딩"/>
+                <a:latin typeface="D2Coding"/>
+                <a:ea typeface="D2Coding"/>
+                <a:cs typeface="D2Coding"/>
               </a:rPr>
               <a:t>       SUM(status = '취소')                             AS 취소건수,</a:t>
             </a:r>
@@ -14610,9 +14610,9 @@
                 <a:solidFill>
                   <a:srgbClr val="E6EAF2"/>
                 </a:solidFill>
-                <a:latin typeface="나눔고딕코딩"/>
-                <a:ea typeface="나눔고딕코딩"/>
-                <a:cs typeface="나눔고딕코딩"/>
+                <a:latin typeface="D2Coding"/>
+                <a:ea typeface="D2Coding"/>
+                <a:cs typeface="D2Coding"/>
               </a:rPr>
               <a:t>       ROUND(SUM(status = '취소') / COUNT(*) * 100, 1) AS 취소율</a:t>
             </a:r>
@@ -14628,9 +14628,9 @@
                 <a:solidFill>
                   <a:srgbClr val="E6EAF2"/>
                 </a:solidFill>
-                <a:latin typeface="나눔고딕코딩"/>
-                <a:ea typeface="나눔고딕코딩"/>
-                <a:cs typeface="나눔고딕코딩"/>
+                <a:latin typeface="D2Coding"/>
+                <a:ea typeface="D2Coding"/>
+                <a:cs typeface="D2Coding"/>
               </a:rPr>
               <a:t>FROM   orders;</a:t>
             </a:r>
@@ -14646,9 +14646,9 @@
                 <a:solidFill>
                   <a:srgbClr val="E6EAF2"/>
                 </a:solidFill>
-                <a:latin typeface="나눔고딕코딩"/>
-                <a:ea typeface="나눔고딕코딩"/>
-                <a:cs typeface="나눔고딕코딩"/>
+                <a:latin typeface="D2Coding"/>
+                <a:ea typeface="D2Coding"/>
+                <a:cs typeface="D2Coding"/>
               </a:rPr>
               <a:t>--  15 | 2 | 13.3</a:t>
             </a:r>
@@ -16656,9 +16656,9 @@
                 <a:solidFill>
                   <a:srgbClr val="7A869C"/>
                 </a:solidFill>
-                <a:latin typeface="나눔고딕코딩"/>
-                <a:ea typeface="나눔고딕코딩"/>
-                <a:cs typeface="나눔고딕코딩"/>
+                <a:latin typeface="D2Coding"/>
+                <a:ea typeface="D2Coding"/>
+                <a:cs typeface="D2Coding"/>
               </a:rPr>
               <a:t>1</a:t>
             </a:r>
@@ -16674,9 +16674,9 @@
                 <a:solidFill>
                   <a:srgbClr val="7A869C"/>
                 </a:solidFill>
-                <a:latin typeface="나눔고딕코딩"/>
-                <a:ea typeface="나눔고딕코딩"/>
-                <a:cs typeface="나눔고딕코딩"/>
+                <a:latin typeface="D2Coding"/>
+                <a:ea typeface="D2Coding"/>
+                <a:cs typeface="D2Coding"/>
               </a:rPr>
               <a:t>2</a:t>
             </a:r>
@@ -16692,9 +16692,9 @@
                 <a:solidFill>
                   <a:srgbClr val="7A869C"/>
                 </a:solidFill>
-                <a:latin typeface="나눔고딕코딩"/>
-                <a:ea typeface="나눔고딕코딩"/>
-                <a:cs typeface="나눔고딕코딩"/>
+                <a:latin typeface="D2Coding"/>
+                <a:ea typeface="D2Coding"/>
+                <a:cs typeface="D2Coding"/>
               </a:rPr>
               <a:t>3</a:t>
             </a:r>
@@ -16710,9 +16710,9 @@
                 <a:solidFill>
                   <a:srgbClr val="7A869C"/>
                 </a:solidFill>
-                <a:latin typeface="나눔고딕코딩"/>
-                <a:ea typeface="나눔고딕코딩"/>
-                <a:cs typeface="나눔고딕코딩"/>
+                <a:latin typeface="D2Coding"/>
+                <a:ea typeface="D2Coding"/>
+                <a:cs typeface="D2Coding"/>
               </a:rPr>
               <a:t>4</a:t>
             </a:r>
@@ -16728,9 +16728,9 @@
                 <a:solidFill>
                   <a:srgbClr val="7A869C"/>
                 </a:solidFill>
-                <a:latin typeface="나눔고딕코딩"/>
-                <a:ea typeface="나눔고딕코딩"/>
-                <a:cs typeface="나눔고딕코딩"/>
+                <a:latin typeface="D2Coding"/>
+                <a:ea typeface="D2Coding"/>
+                <a:cs typeface="D2Coding"/>
               </a:rPr>
               <a:t>5</a:t>
             </a:r>
@@ -16746,9 +16746,9 @@
                 <a:solidFill>
                   <a:srgbClr val="7A869C"/>
                 </a:solidFill>
-                <a:latin typeface="나눔고딕코딩"/>
-                <a:ea typeface="나눔고딕코딩"/>
-                <a:cs typeface="나눔고딕코딩"/>
+                <a:latin typeface="D2Coding"/>
+                <a:ea typeface="D2Coding"/>
+                <a:cs typeface="D2Coding"/>
               </a:rPr>
               <a:t>6</a:t>
             </a:r>
@@ -16764,9 +16764,9 @@
                 <a:solidFill>
                   <a:srgbClr val="7A869C"/>
                 </a:solidFill>
-                <a:latin typeface="나눔고딕코딩"/>
-                <a:ea typeface="나눔고딕코딩"/>
-                <a:cs typeface="나눔고딕코딩"/>
+                <a:latin typeface="D2Coding"/>
+                <a:ea typeface="D2Coding"/>
+                <a:cs typeface="D2Coding"/>
               </a:rPr>
               <a:t>7</a:t>
             </a:r>
@@ -16782,9 +16782,9 @@
                 <a:solidFill>
                   <a:srgbClr val="7A869C"/>
                 </a:solidFill>
-                <a:latin typeface="나눔고딕코딩"/>
-                <a:ea typeface="나눔고딕코딩"/>
-                <a:cs typeface="나눔고딕코딩"/>
+                <a:latin typeface="D2Coding"/>
+                <a:ea typeface="D2Coding"/>
+                <a:cs typeface="D2Coding"/>
               </a:rPr>
               <a:t>8</a:t>
             </a:r>
@@ -16800,9 +16800,9 @@
                 <a:solidFill>
                   <a:srgbClr val="7A869C"/>
                 </a:solidFill>
-                <a:latin typeface="나눔고딕코딩"/>
-                <a:ea typeface="나눔고딕코딩"/>
-                <a:cs typeface="나눔고딕코딩"/>
+                <a:latin typeface="D2Coding"/>
+                <a:ea typeface="D2Coding"/>
+                <a:cs typeface="D2Coding"/>
               </a:rPr>
               <a:t>9</a:t>
             </a:r>
@@ -16818,9 +16818,9 @@
                 <a:solidFill>
                   <a:srgbClr val="7A869C"/>
                 </a:solidFill>
-                <a:latin typeface="나눔고딕코딩"/>
-                <a:ea typeface="나눔고딕코딩"/>
-                <a:cs typeface="나눔고딕코딩"/>
+                <a:latin typeface="D2Coding"/>
+                <a:ea typeface="D2Coding"/>
+                <a:cs typeface="D2Coding"/>
               </a:rPr>
               <a:t>10</a:t>
             </a:r>
@@ -16836,9 +16836,9 @@
                 <a:solidFill>
                   <a:srgbClr val="7A869C"/>
                 </a:solidFill>
-                <a:latin typeface="나눔고딕코딩"/>
-                <a:ea typeface="나눔고딕코딩"/>
-                <a:cs typeface="나눔고딕코딩"/>
+                <a:latin typeface="D2Coding"/>
+                <a:ea typeface="D2Coding"/>
+                <a:cs typeface="D2Coding"/>
               </a:rPr>
               <a:t>11</a:t>
             </a:r>
@@ -16854,9 +16854,9 @@
                 <a:solidFill>
                   <a:srgbClr val="7A869C"/>
                 </a:solidFill>
-                <a:latin typeface="나눔고딕코딩"/>
-                <a:ea typeface="나눔고딕코딩"/>
-                <a:cs typeface="나눔고딕코딩"/>
+                <a:latin typeface="D2Coding"/>
+                <a:ea typeface="D2Coding"/>
+                <a:cs typeface="D2Coding"/>
               </a:rPr>
               <a:t>12</a:t>
             </a:r>
@@ -16872,9 +16872,9 @@
                 <a:solidFill>
                   <a:srgbClr val="7A869C"/>
                 </a:solidFill>
-                <a:latin typeface="나눔고딕코딩"/>
-                <a:ea typeface="나눔고딕코딩"/>
-                <a:cs typeface="나눔고딕코딩"/>
+                <a:latin typeface="D2Coding"/>
+                <a:ea typeface="D2Coding"/>
+                <a:cs typeface="D2Coding"/>
               </a:rPr>
               <a:t>13</a:t>
             </a:r>
@@ -16913,9 +16913,9 @@
                 <a:solidFill>
                   <a:srgbClr val="E6EAF2"/>
                 </a:solidFill>
-                <a:latin typeface="나눔고딕코딩"/>
-                <a:ea typeface="나눔고딕코딩"/>
-                <a:cs typeface="나눔고딕코딩"/>
+                <a:latin typeface="D2Coding"/>
+                <a:ea typeface="D2Coding"/>
+                <a:cs typeface="D2Coding"/>
               </a:rPr>
               <a:t>SELECT e.name, e.dept,</a:t>
             </a:r>
@@ -16931,9 +16931,9 @@
                 <a:solidFill>
                   <a:srgbClr val="E6EAF2"/>
                 </a:solidFill>
-                <a:latin typeface="나눔고딕코딩"/>
-                <a:ea typeface="나눔고딕코딩"/>
-                <a:cs typeface="나눔고딕코딩"/>
+                <a:latin typeface="D2Coding"/>
+                <a:ea typeface="D2Coding"/>
+                <a:cs typeface="D2Coding"/>
               </a:rPr>
               <a:t>       COUNT(o.order_id) AS 유효주문수</a:t>
             </a:r>
@@ -16949,9 +16949,9 @@
                 <a:solidFill>
                   <a:srgbClr val="E6EAF2"/>
                 </a:solidFill>
-                <a:latin typeface="나눔고딕코딩"/>
-                <a:ea typeface="나눔고딕코딩"/>
-                <a:cs typeface="나눔고딕코딩"/>
+                <a:latin typeface="D2Coding"/>
+                <a:ea typeface="D2Coding"/>
+                <a:cs typeface="D2Coding"/>
               </a:rPr>
               <a:t>FROM   employees e</a:t>
             </a:r>
@@ -16967,9 +16967,9 @@
                 <a:solidFill>
                   <a:srgbClr val="E6EAF2"/>
                 </a:solidFill>
-                <a:latin typeface="나눔고딕코딩"/>
-                <a:ea typeface="나눔고딕코딩"/>
-                <a:cs typeface="나눔고딕코딩"/>
+                <a:latin typeface="D2Coding"/>
+                <a:ea typeface="D2Coding"/>
+                <a:cs typeface="D2Coding"/>
               </a:rPr>
               <a:t>LEFT   JOIN orders o</a:t>
             </a:r>
@@ -16985,9 +16985,9 @@
                 <a:solidFill>
                   <a:srgbClr val="E6EAF2"/>
                 </a:solidFill>
-                <a:latin typeface="나눔고딕코딩"/>
-                <a:ea typeface="나눔고딕코딩"/>
-                <a:cs typeface="나눔고딕코딩"/>
+                <a:latin typeface="D2Coding"/>
+                <a:ea typeface="D2Coding"/>
+                <a:cs typeface="D2Coding"/>
               </a:rPr>
               <a:t>       ON  e.emp_id = o.emp_id</a:t>
             </a:r>
@@ -17003,9 +17003,9 @@
                 <a:solidFill>
                   <a:srgbClr val="E6EAF2"/>
                 </a:solidFill>
-                <a:latin typeface="나눔고딕코딩"/>
-                <a:ea typeface="나눔고딕코딩"/>
-                <a:cs typeface="나눔고딕코딩"/>
+                <a:latin typeface="D2Coding"/>
+                <a:ea typeface="D2Coding"/>
+                <a:cs typeface="D2Coding"/>
               </a:rPr>
               <a:t>       AND o.status &lt;&gt; '취소'</a:t>
             </a:r>
@@ -17021,9 +17021,9 @@
                 <a:solidFill>
                   <a:srgbClr val="E6EAF2"/>
                 </a:solidFill>
-                <a:latin typeface="나눔고딕코딩"/>
-                <a:ea typeface="나눔고딕코딩"/>
-                <a:cs typeface="나눔고딕코딩"/>
+                <a:latin typeface="D2Coding"/>
+                <a:ea typeface="D2Coding"/>
+                <a:cs typeface="D2Coding"/>
               </a:rPr>
               <a:t>GROUP  BY e.emp_id, e.name, e.dept</a:t>
             </a:r>
@@ -17039,9 +17039,9 @@
                 <a:solidFill>
                   <a:srgbClr val="E6EAF2"/>
                 </a:solidFill>
-                <a:latin typeface="나눔고딕코딩"/>
-                <a:ea typeface="나눔고딕코딩"/>
-                <a:cs typeface="나눔고딕코딩"/>
+                <a:latin typeface="D2Coding"/>
+                <a:ea typeface="D2Coding"/>
+                <a:cs typeface="D2Coding"/>
               </a:rPr>
               <a:t>ORDER  BY 유효주문수 DESC;</a:t>
             </a:r>
@@ -17057,9 +17057,9 @@
                 <a:solidFill>
                   <a:srgbClr val="E6EAF2"/>
                 </a:solidFill>
-                <a:latin typeface="나눔고딕코딩"/>
-                <a:ea typeface="나눔고딕코딩"/>
-                <a:cs typeface="나눔고딕코딩"/>
+                <a:latin typeface="D2Coding"/>
+                <a:ea typeface="D2Coding"/>
+                <a:cs typeface="D2Coding"/>
               </a:rPr>
               <a:t>/*</a:t>
             </a:r>
@@ -17075,9 +17075,9 @@
                 <a:solidFill>
                   <a:srgbClr val="E6EAF2"/>
                 </a:solidFill>
-                <a:latin typeface="나눔고딕코딩"/>
-                <a:ea typeface="나눔고딕코딩"/>
-                <a:cs typeface="나눔고딕코딩"/>
+                <a:latin typeface="D2Coding"/>
+                <a:ea typeface="D2Coding"/>
+                <a:cs typeface="D2Coding"/>
               </a:rPr>
               <a:t> 이지은 | 영업팀 | 5</a:t>
             </a:r>
@@ -17093,9 +17093,9 @@
                 <a:solidFill>
                   <a:srgbClr val="E6EAF2"/>
                 </a:solidFill>
-                <a:latin typeface="나눔고딕코딩"/>
-                <a:ea typeface="나눔고딕코딩"/>
-                <a:cs typeface="나눔고딕코딩"/>
+                <a:latin typeface="D2Coding"/>
+                <a:ea typeface="D2Coding"/>
+                <a:cs typeface="D2Coding"/>
               </a:rPr>
               <a:t> 박준영 | 영업팀 | 1</a:t>
             </a:r>
@@ -17111,9 +17111,9 @@
                 <a:solidFill>
                   <a:srgbClr val="E6EAF2"/>
                 </a:solidFill>
-                <a:latin typeface="나눔고딕코딩"/>
-                <a:ea typeface="나눔고딕코딩"/>
-                <a:cs typeface="나눔고딕코딩"/>
+                <a:latin typeface="D2Coding"/>
+                <a:ea typeface="D2Coding"/>
+                <a:cs typeface="D2Coding"/>
               </a:rPr>
               <a:t> (나머지 직원 6명은 0)</a:t>
             </a:r>
@@ -17129,9 +17129,9 @@
                 <a:solidFill>
                   <a:srgbClr val="E6EAF2"/>
                 </a:solidFill>
-                <a:latin typeface="나눔고딕코딩"/>
-                <a:ea typeface="나눔고딕코딩"/>
-                <a:cs typeface="나눔고딕코딩"/>
+                <a:latin typeface="D2Coding"/>
+                <a:ea typeface="D2Coding"/>
+                <a:cs typeface="D2Coding"/>
               </a:rPr>
               <a:t>*/</a:t>
             </a:r>
@@ -36099,9 +36099,9 @@
                 <a:solidFill>
                   <a:srgbClr val="7A869C"/>
                 </a:solidFill>
-                <a:latin typeface="나눔고딕코딩"/>
-                <a:ea typeface="나눔고딕코딩"/>
-                <a:cs typeface="나눔고딕코딩"/>
+                <a:latin typeface="D2Coding"/>
+                <a:ea typeface="D2Coding"/>
+                <a:cs typeface="D2Coding"/>
               </a:rPr>
               <a:t>1</a:t>
             </a:r>
@@ -36117,9 +36117,9 @@
                 <a:solidFill>
                   <a:srgbClr val="7A869C"/>
                 </a:solidFill>
-                <a:latin typeface="나눔고딕코딩"/>
-                <a:ea typeface="나눔고딕코딩"/>
-                <a:cs typeface="나눔고딕코딩"/>
+                <a:latin typeface="D2Coding"/>
+                <a:ea typeface="D2Coding"/>
+                <a:cs typeface="D2Coding"/>
               </a:rPr>
               <a:t>2</a:t>
             </a:r>
@@ -36135,9 +36135,9 @@
                 <a:solidFill>
                   <a:srgbClr val="7A869C"/>
                 </a:solidFill>
-                <a:latin typeface="나눔고딕코딩"/>
-                <a:ea typeface="나눔고딕코딩"/>
-                <a:cs typeface="나눔고딕코딩"/>
+                <a:latin typeface="D2Coding"/>
+                <a:ea typeface="D2Coding"/>
+                <a:cs typeface="D2Coding"/>
               </a:rPr>
               <a:t>3</a:t>
             </a:r>
@@ -36153,9 +36153,9 @@
                 <a:solidFill>
                   <a:srgbClr val="7A869C"/>
                 </a:solidFill>
-                <a:latin typeface="나눔고딕코딩"/>
-                <a:ea typeface="나눔고딕코딩"/>
-                <a:cs typeface="나눔고딕코딩"/>
+                <a:latin typeface="D2Coding"/>
+                <a:ea typeface="D2Coding"/>
+                <a:cs typeface="D2Coding"/>
               </a:rPr>
               <a:t>4</a:t>
             </a:r>
@@ -36171,9 +36171,9 @@
                 <a:solidFill>
                   <a:srgbClr val="7A869C"/>
                 </a:solidFill>
-                <a:latin typeface="나눔고딕코딩"/>
-                <a:ea typeface="나눔고딕코딩"/>
-                <a:cs typeface="나눔고딕코딩"/>
+                <a:latin typeface="D2Coding"/>
+                <a:ea typeface="D2Coding"/>
+                <a:cs typeface="D2Coding"/>
               </a:rPr>
               <a:t>5</a:t>
             </a:r>
@@ -36189,9 +36189,9 @@
                 <a:solidFill>
                   <a:srgbClr val="7A869C"/>
                 </a:solidFill>
-                <a:latin typeface="나눔고딕코딩"/>
-                <a:ea typeface="나눔고딕코딩"/>
-                <a:cs typeface="나눔고딕코딩"/>
+                <a:latin typeface="D2Coding"/>
+                <a:ea typeface="D2Coding"/>
+                <a:cs typeface="D2Coding"/>
               </a:rPr>
               <a:t>6</a:t>
             </a:r>
@@ -36207,9 +36207,9 @@
                 <a:solidFill>
                   <a:srgbClr val="7A869C"/>
                 </a:solidFill>
-                <a:latin typeface="나눔고딕코딩"/>
-                <a:ea typeface="나눔고딕코딩"/>
-                <a:cs typeface="나눔고딕코딩"/>
+                <a:latin typeface="D2Coding"/>
+                <a:ea typeface="D2Coding"/>
+                <a:cs typeface="D2Coding"/>
               </a:rPr>
               <a:t>7</a:t>
             </a:r>
@@ -36225,9 +36225,9 @@
                 <a:solidFill>
                   <a:srgbClr val="7A869C"/>
                 </a:solidFill>
-                <a:latin typeface="나눔고딕코딩"/>
-                <a:ea typeface="나눔고딕코딩"/>
-                <a:cs typeface="나눔고딕코딩"/>
+                <a:latin typeface="D2Coding"/>
+                <a:ea typeface="D2Coding"/>
+                <a:cs typeface="D2Coding"/>
               </a:rPr>
               <a:t>8</a:t>
             </a:r>
@@ -36243,9 +36243,9 @@
                 <a:solidFill>
                   <a:srgbClr val="7A869C"/>
                 </a:solidFill>
-                <a:latin typeface="나눔고딕코딩"/>
-                <a:ea typeface="나눔고딕코딩"/>
-                <a:cs typeface="나눔고딕코딩"/>
+                <a:latin typeface="D2Coding"/>
+                <a:ea typeface="D2Coding"/>
+                <a:cs typeface="D2Coding"/>
               </a:rPr>
               <a:t>9</a:t>
             </a:r>
@@ -36261,9 +36261,9 @@
                 <a:solidFill>
                   <a:srgbClr val="7A869C"/>
                 </a:solidFill>
-                <a:latin typeface="나눔고딕코딩"/>
-                <a:ea typeface="나눔고딕코딩"/>
-                <a:cs typeface="나눔고딕코딩"/>
+                <a:latin typeface="D2Coding"/>
+                <a:ea typeface="D2Coding"/>
+                <a:cs typeface="D2Coding"/>
               </a:rPr>
               <a:t>10</a:t>
             </a:r>
@@ -36279,9 +36279,9 @@
                 <a:solidFill>
                   <a:srgbClr val="7A869C"/>
                 </a:solidFill>
-                <a:latin typeface="나눔고딕코딩"/>
-                <a:ea typeface="나눔고딕코딩"/>
-                <a:cs typeface="나눔고딕코딩"/>
+                <a:latin typeface="D2Coding"/>
+                <a:ea typeface="D2Coding"/>
+                <a:cs typeface="D2Coding"/>
               </a:rPr>
               <a:t>11</a:t>
             </a:r>
@@ -36297,9 +36297,9 @@
                 <a:solidFill>
                   <a:srgbClr val="7A869C"/>
                 </a:solidFill>
-                <a:latin typeface="나눔고딕코딩"/>
-                <a:ea typeface="나눔고딕코딩"/>
-                <a:cs typeface="나눔고딕코딩"/>
+                <a:latin typeface="D2Coding"/>
+                <a:ea typeface="D2Coding"/>
+                <a:cs typeface="D2Coding"/>
               </a:rPr>
               <a:t>12</a:t>
             </a:r>
@@ -36315,9 +36315,9 @@
                 <a:solidFill>
                   <a:srgbClr val="7A869C"/>
                 </a:solidFill>
-                <a:latin typeface="나눔고딕코딩"/>
-                <a:ea typeface="나눔고딕코딩"/>
-                <a:cs typeface="나눔고딕코딩"/>
+                <a:latin typeface="D2Coding"/>
+                <a:ea typeface="D2Coding"/>
+                <a:cs typeface="D2Coding"/>
               </a:rPr>
               <a:t>13</a:t>
             </a:r>
@@ -36356,9 +36356,9 @@
                 <a:solidFill>
                   <a:srgbClr val="E6EAF2"/>
                 </a:solidFill>
-                <a:latin typeface="나눔고딕코딩"/>
-                <a:ea typeface="나눔고딕코딩"/>
-                <a:cs typeface="나눔고딕코딩"/>
+                <a:latin typeface="D2Coding"/>
+                <a:ea typeface="D2Coding"/>
+                <a:cs typeface="D2Coding"/>
               </a:rPr>
               <a:t>SELECT QUARTER(o.order_date)      AS 분기,</a:t>
             </a:r>
@@ -36374,9 +36374,9 @@
                 <a:solidFill>
                   <a:srgbClr val="E6EAF2"/>
                 </a:solidFill>
-                <a:latin typeface="나눔고딕코딩"/>
-                <a:ea typeface="나눔고딕코딩"/>
-                <a:cs typeface="나눔고딕코딩"/>
+                <a:latin typeface="D2Coding"/>
+                <a:ea typeface="D2Coding"/>
+                <a:cs typeface="D2Coding"/>
               </a:rPr>
               <a:t>       COUNT(DISTINCT o.order_id) AS 주문건수,</a:t>
             </a:r>
@@ -36392,9 +36392,9 @@
                 <a:solidFill>
                   <a:srgbClr val="E6EAF2"/>
                 </a:solidFill>
-                <a:latin typeface="나눔고딕코딩"/>
-                <a:ea typeface="나눔고딕코딩"/>
-                <a:cs typeface="나눔고딕코딩"/>
+                <a:latin typeface="D2Coding"/>
+                <a:ea typeface="D2Coding"/>
+                <a:cs typeface="D2Coding"/>
               </a:rPr>
               <a:t>       SUM(i.qty * i.unit_price)  AS 매출액</a:t>
             </a:r>
@@ -36410,9 +36410,9 @@
                 <a:solidFill>
                   <a:srgbClr val="E6EAF2"/>
                 </a:solidFill>
-                <a:latin typeface="나눔고딕코딩"/>
-                <a:ea typeface="나눔고딕코딩"/>
-                <a:cs typeface="나눔고딕코딩"/>
+                <a:latin typeface="D2Coding"/>
+                <a:ea typeface="D2Coding"/>
+                <a:cs typeface="D2Coding"/>
               </a:rPr>
               <a:t>FROM   orders o</a:t>
             </a:r>
@@ -36428,9 +36428,9 @@
                 <a:solidFill>
                   <a:srgbClr val="E6EAF2"/>
                 </a:solidFill>
-                <a:latin typeface="나눔고딕코딩"/>
-                <a:ea typeface="나눔고딕코딩"/>
-                <a:cs typeface="나눔고딕코딩"/>
+                <a:latin typeface="D2Coding"/>
+                <a:ea typeface="D2Coding"/>
+                <a:cs typeface="D2Coding"/>
               </a:rPr>
               <a:t>JOIN   order_items i ON o.order_id = i.order_id</a:t>
             </a:r>
@@ -36446,9 +36446,9 @@
                 <a:solidFill>
                   <a:srgbClr val="E6EAF2"/>
                 </a:solidFill>
-                <a:latin typeface="나눔고딕코딩"/>
-                <a:ea typeface="나눔고딕코딩"/>
-                <a:cs typeface="나눔고딕코딩"/>
+                <a:latin typeface="D2Coding"/>
+                <a:ea typeface="D2Coding"/>
+                <a:cs typeface="D2Coding"/>
               </a:rPr>
               <a:t>WHERE  o.status &lt;&gt; '취소'</a:t>
             </a:r>
@@ -36464,9 +36464,9 @@
                 <a:solidFill>
                   <a:srgbClr val="E6EAF2"/>
                 </a:solidFill>
-                <a:latin typeface="나눔고딕코딩"/>
-                <a:ea typeface="나눔고딕코딩"/>
-                <a:cs typeface="나눔고딕코딩"/>
+                <a:latin typeface="D2Coding"/>
+                <a:ea typeface="D2Coding"/>
+                <a:cs typeface="D2Coding"/>
               </a:rPr>
               <a:t>  AND  YEAR(o.order_date) = 2026</a:t>
             </a:r>
@@ -36482,9 +36482,9 @@
                 <a:solidFill>
                   <a:srgbClr val="E6EAF2"/>
                 </a:solidFill>
-                <a:latin typeface="나눔고딕코딩"/>
-                <a:ea typeface="나눔고딕코딩"/>
-                <a:cs typeface="나눔고딕코딩"/>
+                <a:latin typeface="D2Coding"/>
+                <a:ea typeface="D2Coding"/>
+                <a:cs typeface="D2Coding"/>
               </a:rPr>
               <a:t>GROUP  BY QUARTER(o.order_date)</a:t>
             </a:r>
@@ -36500,9 +36500,9 @@
                 <a:solidFill>
                   <a:srgbClr val="E6EAF2"/>
                 </a:solidFill>
-                <a:latin typeface="나눔고딕코딩"/>
-                <a:ea typeface="나눔고딕코딩"/>
-                <a:cs typeface="나눔고딕코딩"/>
+                <a:latin typeface="D2Coding"/>
+                <a:ea typeface="D2Coding"/>
+                <a:cs typeface="D2Coding"/>
               </a:rPr>
               <a:t>ORDER  BY 분기;</a:t>
             </a:r>
@@ -36518,9 +36518,9 @@
                 <a:solidFill>
                   <a:srgbClr val="E6EAF2"/>
                 </a:solidFill>
-                <a:latin typeface="나눔고딕코딩"/>
-                <a:ea typeface="나눔고딕코딩"/>
-                <a:cs typeface="나눔고딕코딩"/>
+                <a:latin typeface="D2Coding"/>
+                <a:ea typeface="D2Coding"/>
+                <a:cs typeface="D2Coding"/>
               </a:rPr>
               <a:t>/*</a:t>
             </a:r>
@@ -36536,9 +36536,9 @@
                 <a:solidFill>
                   <a:srgbClr val="E6EAF2"/>
                 </a:solidFill>
-                <a:latin typeface="나눔고딕코딩"/>
-                <a:ea typeface="나눔고딕코딩"/>
-                <a:cs typeface="나눔고딕코딩"/>
+                <a:latin typeface="D2Coding"/>
+                <a:ea typeface="D2Coding"/>
+                <a:cs typeface="D2Coding"/>
               </a:rPr>
               <a:t> 1 | 7 | 536400</a:t>
             </a:r>
@@ -36554,9 +36554,9 @@
                 <a:solidFill>
                   <a:srgbClr val="E6EAF2"/>
                 </a:solidFill>
-                <a:latin typeface="나눔고딕코딩"/>
-                <a:ea typeface="나눔고딕코딩"/>
-                <a:cs typeface="나눔고딕코딩"/>
+                <a:latin typeface="D2Coding"/>
+                <a:ea typeface="D2Coding"/>
+                <a:cs typeface="D2Coding"/>
               </a:rPr>
               <a:t> 2 | 6 | 428700</a:t>
             </a:r>
@@ -36572,9 +36572,9 @@
                 <a:solidFill>
                   <a:srgbClr val="E6EAF2"/>
                 </a:solidFill>
-                <a:latin typeface="나눔고딕코딩"/>
-                <a:ea typeface="나눔고딕코딩"/>
-                <a:cs typeface="나눔고딕코딩"/>
+                <a:latin typeface="D2Coding"/>
+                <a:ea typeface="D2Coding"/>
+                <a:cs typeface="D2Coding"/>
               </a:rPr>
               <a:t>*/</a:t>
             </a:r>
@@ -38642,9 +38642,9 @@
                 <a:solidFill>
                   <a:srgbClr val="7A869C"/>
                 </a:solidFill>
-                <a:latin typeface="나눔고딕코딩"/>
-                <a:ea typeface="나눔고딕코딩"/>
-                <a:cs typeface="나눔고딕코딩"/>
+                <a:latin typeface="D2Coding"/>
+                <a:ea typeface="D2Coding"/>
+                <a:cs typeface="D2Coding"/>
               </a:rPr>
               <a:t>1</a:t>
             </a:r>
@@ -38660,9 +38660,9 @@
                 <a:solidFill>
                   <a:srgbClr val="7A869C"/>
                 </a:solidFill>
-                <a:latin typeface="나눔고딕코딩"/>
-                <a:ea typeface="나눔고딕코딩"/>
-                <a:cs typeface="나눔고딕코딩"/>
+                <a:latin typeface="D2Coding"/>
+                <a:ea typeface="D2Coding"/>
+                <a:cs typeface="D2Coding"/>
               </a:rPr>
               <a:t>2</a:t>
             </a:r>
@@ -38678,9 +38678,9 @@
                 <a:solidFill>
                   <a:srgbClr val="7A869C"/>
                 </a:solidFill>
-                <a:latin typeface="나눔고딕코딩"/>
-                <a:ea typeface="나눔고딕코딩"/>
-                <a:cs typeface="나눔고딕코딩"/>
+                <a:latin typeface="D2Coding"/>
+                <a:ea typeface="D2Coding"/>
+                <a:cs typeface="D2Coding"/>
               </a:rPr>
               <a:t>3</a:t>
             </a:r>
@@ -38696,9 +38696,9 @@
                 <a:solidFill>
                   <a:srgbClr val="7A869C"/>
                 </a:solidFill>
-                <a:latin typeface="나눔고딕코딩"/>
-                <a:ea typeface="나눔고딕코딩"/>
-                <a:cs typeface="나눔고딕코딩"/>
+                <a:latin typeface="D2Coding"/>
+                <a:ea typeface="D2Coding"/>
+                <a:cs typeface="D2Coding"/>
               </a:rPr>
               <a:t>4</a:t>
             </a:r>
@@ -38714,9 +38714,9 @@
                 <a:solidFill>
                   <a:srgbClr val="7A869C"/>
                 </a:solidFill>
-                <a:latin typeface="나눔고딕코딩"/>
-                <a:ea typeface="나눔고딕코딩"/>
-                <a:cs typeface="나눔고딕코딩"/>
+                <a:latin typeface="D2Coding"/>
+                <a:ea typeface="D2Coding"/>
+                <a:cs typeface="D2Coding"/>
               </a:rPr>
               <a:t>5</a:t>
             </a:r>
@@ -38732,9 +38732,9 @@
                 <a:solidFill>
                   <a:srgbClr val="7A869C"/>
                 </a:solidFill>
-                <a:latin typeface="나눔고딕코딩"/>
-                <a:ea typeface="나눔고딕코딩"/>
-                <a:cs typeface="나눔고딕코딩"/>
+                <a:latin typeface="D2Coding"/>
+                <a:ea typeface="D2Coding"/>
+                <a:cs typeface="D2Coding"/>
               </a:rPr>
               <a:t>6</a:t>
             </a:r>
@@ -38750,9 +38750,9 @@
                 <a:solidFill>
                   <a:srgbClr val="7A869C"/>
                 </a:solidFill>
-                <a:latin typeface="나눔고딕코딩"/>
-                <a:ea typeface="나눔고딕코딩"/>
-                <a:cs typeface="나눔고딕코딩"/>
+                <a:latin typeface="D2Coding"/>
+                <a:ea typeface="D2Coding"/>
+                <a:cs typeface="D2Coding"/>
               </a:rPr>
               <a:t>7</a:t>
             </a:r>
@@ -38768,9 +38768,9 @@
                 <a:solidFill>
                   <a:srgbClr val="7A869C"/>
                 </a:solidFill>
-                <a:latin typeface="나눔고딕코딩"/>
-                <a:ea typeface="나눔고딕코딩"/>
-                <a:cs typeface="나눔고딕코딩"/>
+                <a:latin typeface="D2Coding"/>
+                <a:ea typeface="D2Coding"/>
+                <a:cs typeface="D2Coding"/>
               </a:rPr>
               <a:t>8</a:t>
             </a:r>
@@ -38786,9 +38786,9 @@
                 <a:solidFill>
                   <a:srgbClr val="7A869C"/>
                 </a:solidFill>
-                <a:latin typeface="나눔고딕코딩"/>
-                <a:ea typeface="나눔고딕코딩"/>
-                <a:cs typeface="나눔고딕코딩"/>
+                <a:latin typeface="D2Coding"/>
+                <a:ea typeface="D2Coding"/>
+                <a:cs typeface="D2Coding"/>
               </a:rPr>
               <a:t>9</a:t>
             </a:r>
@@ -38804,9 +38804,9 @@
                 <a:solidFill>
                   <a:srgbClr val="7A869C"/>
                 </a:solidFill>
-                <a:latin typeface="나눔고딕코딩"/>
-                <a:ea typeface="나눔고딕코딩"/>
-                <a:cs typeface="나눔고딕코딩"/>
+                <a:latin typeface="D2Coding"/>
+                <a:ea typeface="D2Coding"/>
+                <a:cs typeface="D2Coding"/>
               </a:rPr>
               <a:t>10</a:t>
             </a:r>
@@ -38822,9 +38822,9 @@
                 <a:solidFill>
                   <a:srgbClr val="7A869C"/>
                 </a:solidFill>
-                <a:latin typeface="나눔고딕코딩"/>
-                <a:ea typeface="나눔고딕코딩"/>
-                <a:cs typeface="나눔고딕코딩"/>
+                <a:latin typeface="D2Coding"/>
+                <a:ea typeface="D2Coding"/>
+                <a:cs typeface="D2Coding"/>
               </a:rPr>
               <a:t>11</a:t>
             </a:r>
@@ -38840,9 +38840,9 @@
                 <a:solidFill>
                   <a:srgbClr val="7A869C"/>
                 </a:solidFill>
-                <a:latin typeface="나눔고딕코딩"/>
-                <a:ea typeface="나눔고딕코딩"/>
-                <a:cs typeface="나눔고딕코딩"/>
+                <a:latin typeface="D2Coding"/>
+                <a:ea typeface="D2Coding"/>
+                <a:cs typeface="D2Coding"/>
               </a:rPr>
               <a:t>12</a:t>
             </a:r>
@@ -38858,9 +38858,9 @@
                 <a:solidFill>
                   <a:srgbClr val="7A869C"/>
                 </a:solidFill>
-                <a:latin typeface="나눔고딕코딩"/>
-                <a:ea typeface="나눔고딕코딩"/>
-                <a:cs typeface="나눔고딕코딩"/>
+                <a:latin typeface="D2Coding"/>
+                <a:ea typeface="D2Coding"/>
+                <a:cs typeface="D2Coding"/>
               </a:rPr>
               <a:t>13</a:t>
             </a:r>
@@ -38876,9 +38876,9 @@
                 <a:solidFill>
                   <a:srgbClr val="7A869C"/>
                 </a:solidFill>
-                <a:latin typeface="나눔고딕코딩"/>
-                <a:ea typeface="나눔고딕코딩"/>
-                <a:cs typeface="나눔고딕코딩"/>
+                <a:latin typeface="D2Coding"/>
+                <a:ea typeface="D2Coding"/>
+                <a:cs typeface="D2Coding"/>
               </a:rPr>
               <a:t>14</a:t>
             </a:r>
@@ -38894,9 +38894,9 @@
                 <a:solidFill>
                   <a:srgbClr val="7A869C"/>
                 </a:solidFill>
-                <a:latin typeface="나눔고딕코딩"/>
-                <a:ea typeface="나눔고딕코딩"/>
-                <a:cs typeface="나눔고딕코딩"/>
+                <a:latin typeface="D2Coding"/>
+                <a:ea typeface="D2Coding"/>
+                <a:cs typeface="D2Coding"/>
               </a:rPr>
               <a:t>15</a:t>
             </a:r>
@@ -38935,9 +38935,9 @@
                 <a:solidFill>
                   <a:srgbClr val="E6EAF2"/>
                 </a:solidFill>
-                <a:latin typeface="나눔고딕코딩"/>
-                <a:ea typeface="나눔고딕코딩"/>
-                <a:cs typeface="나눔고딕코딩"/>
+                <a:latin typeface="D2Coding"/>
+                <a:ea typeface="D2Coding"/>
+                <a:cs typeface="D2Coding"/>
               </a:rPr>
               <a:t>SELECT p.name                    AS 상품명,</a:t>
             </a:r>
@@ -38953,9 +38953,9 @@
                 <a:solidFill>
                   <a:srgbClr val="E6EAF2"/>
                 </a:solidFill>
-                <a:latin typeface="나눔고딕코딩"/>
-                <a:ea typeface="나눔고딕코딩"/>
-                <a:cs typeface="나눔고딕코딩"/>
+                <a:latin typeface="D2Coding"/>
+                <a:ea typeface="D2Coding"/>
+                <a:cs typeface="D2Coding"/>
               </a:rPr>
               <a:t>       SUM(i.qty)                AS 판매수량,</a:t>
             </a:r>
@@ -38971,9 +38971,9 @@
                 <a:solidFill>
                   <a:srgbClr val="E6EAF2"/>
                 </a:solidFill>
-                <a:latin typeface="나눔고딕코딩"/>
-                <a:ea typeface="나눔고딕코딩"/>
-                <a:cs typeface="나눔고딕코딩"/>
+                <a:latin typeface="D2Coding"/>
+                <a:ea typeface="D2Coding"/>
+                <a:cs typeface="D2Coding"/>
               </a:rPr>
               <a:t>       SUM(i.qty * i.unit_price) AS 매출액</a:t>
             </a:r>
@@ -38989,9 +38989,9 @@
                 <a:solidFill>
                   <a:srgbClr val="E6EAF2"/>
                 </a:solidFill>
-                <a:latin typeface="나눔고딕코딩"/>
-                <a:ea typeface="나눔고딕코딩"/>
-                <a:cs typeface="나눔고딕코딩"/>
+                <a:latin typeface="D2Coding"/>
+                <a:ea typeface="D2Coding"/>
+                <a:cs typeface="D2Coding"/>
               </a:rPr>
               <a:t>FROM   products p</a:t>
             </a:r>
@@ -39007,9 +39007,9 @@
                 <a:solidFill>
                   <a:srgbClr val="E6EAF2"/>
                 </a:solidFill>
-                <a:latin typeface="나눔고딕코딩"/>
-                <a:ea typeface="나눔고딕코딩"/>
-                <a:cs typeface="나눔고딕코딩"/>
+                <a:latin typeface="D2Coding"/>
+                <a:ea typeface="D2Coding"/>
+                <a:cs typeface="D2Coding"/>
               </a:rPr>
               <a:t>JOIN   order_items i ON p.prod_id = i.prod_id</a:t>
             </a:r>
@@ -39025,9 +39025,9 @@
                 <a:solidFill>
                   <a:srgbClr val="E6EAF2"/>
                 </a:solidFill>
-                <a:latin typeface="나눔고딕코딩"/>
-                <a:ea typeface="나눔고딕코딩"/>
-                <a:cs typeface="나눔고딕코딩"/>
+                <a:latin typeface="D2Coding"/>
+                <a:ea typeface="D2Coding"/>
+                <a:cs typeface="D2Coding"/>
               </a:rPr>
               <a:t>JOIN   orders      o ON i.order_id = o.order_id</a:t>
             </a:r>
@@ -39043,9 +39043,9 @@
                 <a:solidFill>
                   <a:srgbClr val="E6EAF2"/>
                 </a:solidFill>
-                <a:latin typeface="나눔고딕코딩"/>
-                <a:ea typeface="나눔고딕코딩"/>
-                <a:cs typeface="나눔고딕코딩"/>
+                <a:latin typeface="D2Coding"/>
+                <a:ea typeface="D2Coding"/>
+                <a:cs typeface="D2Coding"/>
               </a:rPr>
               <a:t>WHERE  o.status &lt;&gt; '취소'</a:t>
             </a:r>
@@ -39061,9 +39061,9 @@
                 <a:solidFill>
                   <a:srgbClr val="E6EAF2"/>
                 </a:solidFill>
-                <a:latin typeface="나눔고딕코딩"/>
-                <a:ea typeface="나눔고딕코딩"/>
-                <a:cs typeface="나눔고딕코딩"/>
+                <a:latin typeface="D2Coding"/>
+                <a:ea typeface="D2Coding"/>
+                <a:cs typeface="D2Coding"/>
               </a:rPr>
               <a:t>GROUP  BY p.prod_id, p.name</a:t>
             </a:r>
@@ -39079,9 +39079,9 @@
                 <a:solidFill>
                   <a:srgbClr val="E6EAF2"/>
                 </a:solidFill>
-                <a:latin typeface="나눔고딕코딩"/>
-                <a:ea typeface="나눔고딕코딩"/>
-                <a:cs typeface="나눔고딕코딩"/>
+                <a:latin typeface="D2Coding"/>
+                <a:ea typeface="D2Coding"/>
+                <a:cs typeface="D2Coding"/>
               </a:rPr>
               <a:t>ORDER  BY 매출액 DESC</a:t>
             </a:r>
@@ -39097,9 +39097,9 @@
                 <a:solidFill>
                   <a:srgbClr val="E6EAF2"/>
                 </a:solidFill>
-                <a:latin typeface="나눔고딕코딩"/>
-                <a:ea typeface="나눔고딕코딩"/>
-                <a:cs typeface="나눔고딕코딩"/>
+                <a:latin typeface="D2Coding"/>
+                <a:ea typeface="D2Coding"/>
+                <a:cs typeface="D2Coding"/>
               </a:rPr>
               <a:t>LIMIT  3;</a:t>
             </a:r>
@@ -39115,9 +39115,9 @@
                 <a:solidFill>
                   <a:srgbClr val="E6EAF2"/>
                 </a:solidFill>
-                <a:latin typeface="나눔고딕코딩"/>
-                <a:ea typeface="나눔고딕코딩"/>
-                <a:cs typeface="나눔고딕코딩"/>
+                <a:latin typeface="D2Coding"/>
+                <a:ea typeface="D2Coding"/>
+                <a:cs typeface="D2Coding"/>
               </a:rPr>
               <a:t>/*</a:t>
             </a:r>
@@ -39133,9 +39133,9 @@
                 <a:solidFill>
                   <a:srgbClr val="E6EAF2"/>
                 </a:solidFill>
-                <a:latin typeface="나눔고딕코딩"/>
-                <a:ea typeface="나눔고딕코딩"/>
-                <a:cs typeface="나눔고딕코딩"/>
+                <a:latin typeface="D2Coding"/>
+                <a:ea typeface="D2Coding"/>
+                <a:cs typeface="D2Coding"/>
               </a:rPr>
               <a:t> 공기청정기       | 2 | 378000</a:t>
             </a:r>
@@ -39151,9 +39151,9 @@
                 <a:solidFill>
                   <a:srgbClr val="E6EAF2"/>
                 </a:solidFill>
-                <a:latin typeface="나눔고딕코딩"/>
-                <a:ea typeface="나눔고딕코딩"/>
-                <a:cs typeface="나눔고딕코딩"/>
+                <a:latin typeface="D2Coding"/>
+                <a:ea typeface="D2Coding"/>
+                <a:cs typeface="D2Coding"/>
               </a:rPr>
               <a:t> 무선 전기포트    | 3 | 126000</a:t>
             </a:r>
@@ -39169,9 +39169,9 @@
                 <a:solidFill>
                   <a:srgbClr val="E6EAF2"/>
                 </a:solidFill>
-                <a:latin typeface="나눔고딕코딩"/>
-                <a:ea typeface="나눔고딕코딩"/>
-                <a:cs typeface="나눔고딕코딩"/>
+                <a:latin typeface="D2Coding"/>
+                <a:ea typeface="D2Coding"/>
+                <a:cs typeface="D2Coding"/>
               </a:rPr>
               <a:t> 곡물 시리얼 세트 | 6 |  94800</a:t>
             </a:r>
@@ -39187,9 +39187,9 @@
                 <a:solidFill>
                   <a:srgbClr val="E6EAF2"/>
                 </a:solidFill>
-                <a:latin typeface="나눔고딕코딩"/>
-                <a:ea typeface="나눔고딕코딩"/>
-                <a:cs typeface="나눔고딕코딩"/>
+                <a:latin typeface="D2Coding"/>
+                <a:ea typeface="D2Coding"/>
+                <a:cs typeface="D2Coding"/>
               </a:rPr>
               <a:t>*/</a:t>
             </a:r>
@@ -41257,9 +41257,9 @@
                 <a:solidFill>
                   <a:srgbClr val="7A869C"/>
                 </a:solidFill>
-                <a:latin typeface="나눔고딕코딩"/>
-                <a:ea typeface="나눔고딕코딩"/>
-                <a:cs typeface="나눔고딕코딩"/>
+                <a:latin typeface="D2Coding"/>
+                <a:ea typeface="D2Coding"/>
+                <a:cs typeface="D2Coding"/>
               </a:rPr>
               <a:t>1</a:t>
             </a:r>
@@ -41275,9 +41275,9 @@
                 <a:solidFill>
                   <a:srgbClr val="7A869C"/>
                 </a:solidFill>
-                <a:latin typeface="나눔고딕코딩"/>
-                <a:ea typeface="나눔고딕코딩"/>
-                <a:cs typeface="나눔고딕코딩"/>
+                <a:latin typeface="D2Coding"/>
+                <a:ea typeface="D2Coding"/>
+                <a:cs typeface="D2Coding"/>
               </a:rPr>
               <a:t>2</a:t>
             </a:r>
@@ -41293,9 +41293,9 @@
                 <a:solidFill>
                   <a:srgbClr val="7A869C"/>
                 </a:solidFill>
-                <a:latin typeface="나눔고딕코딩"/>
-                <a:ea typeface="나눔고딕코딩"/>
-                <a:cs typeface="나눔고딕코딩"/>
+                <a:latin typeface="D2Coding"/>
+                <a:ea typeface="D2Coding"/>
+                <a:cs typeface="D2Coding"/>
               </a:rPr>
               <a:t>3</a:t>
             </a:r>
@@ -41311,9 +41311,9 @@
                 <a:solidFill>
                   <a:srgbClr val="7A869C"/>
                 </a:solidFill>
-                <a:latin typeface="나눔고딕코딩"/>
-                <a:ea typeface="나눔고딕코딩"/>
-                <a:cs typeface="나눔고딕코딩"/>
+                <a:latin typeface="D2Coding"/>
+                <a:ea typeface="D2Coding"/>
+                <a:cs typeface="D2Coding"/>
               </a:rPr>
               <a:t>4</a:t>
             </a:r>
@@ -41329,9 +41329,9 @@
                 <a:solidFill>
                   <a:srgbClr val="7A869C"/>
                 </a:solidFill>
-                <a:latin typeface="나눔고딕코딩"/>
-                <a:ea typeface="나눔고딕코딩"/>
-                <a:cs typeface="나눔고딕코딩"/>
+                <a:latin typeface="D2Coding"/>
+                <a:ea typeface="D2Coding"/>
+                <a:cs typeface="D2Coding"/>
               </a:rPr>
               <a:t>5</a:t>
             </a:r>
@@ -41347,9 +41347,9 @@
                 <a:solidFill>
                   <a:srgbClr val="7A869C"/>
                 </a:solidFill>
-                <a:latin typeface="나눔고딕코딩"/>
-                <a:ea typeface="나눔고딕코딩"/>
-                <a:cs typeface="나눔고딕코딩"/>
+                <a:latin typeface="D2Coding"/>
+                <a:ea typeface="D2Coding"/>
+                <a:cs typeface="D2Coding"/>
               </a:rPr>
               <a:t>6</a:t>
             </a:r>
@@ -41365,9 +41365,9 @@
                 <a:solidFill>
                   <a:srgbClr val="7A869C"/>
                 </a:solidFill>
-                <a:latin typeface="나눔고딕코딩"/>
-                <a:ea typeface="나눔고딕코딩"/>
-                <a:cs typeface="나눔고딕코딩"/>
+                <a:latin typeface="D2Coding"/>
+                <a:ea typeface="D2Coding"/>
+                <a:cs typeface="D2Coding"/>
               </a:rPr>
               <a:t>7</a:t>
             </a:r>
@@ -41383,9 +41383,9 @@
                 <a:solidFill>
                   <a:srgbClr val="7A869C"/>
                 </a:solidFill>
-                <a:latin typeface="나눔고딕코딩"/>
-                <a:ea typeface="나눔고딕코딩"/>
-                <a:cs typeface="나눔고딕코딩"/>
+                <a:latin typeface="D2Coding"/>
+                <a:ea typeface="D2Coding"/>
+                <a:cs typeface="D2Coding"/>
               </a:rPr>
               <a:t>8</a:t>
             </a:r>
@@ -41401,9 +41401,9 @@
                 <a:solidFill>
                   <a:srgbClr val="7A869C"/>
                 </a:solidFill>
-                <a:latin typeface="나눔고딕코딩"/>
-                <a:ea typeface="나눔고딕코딩"/>
-                <a:cs typeface="나눔고딕코딩"/>
+                <a:latin typeface="D2Coding"/>
+                <a:ea typeface="D2Coding"/>
+                <a:cs typeface="D2Coding"/>
               </a:rPr>
               <a:t>9</a:t>
             </a:r>
@@ -41419,9 +41419,9 @@
                 <a:solidFill>
                   <a:srgbClr val="7A869C"/>
                 </a:solidFill>
-                <a:latin typeface="나눔고딕코딩"/>
-                <a:ea typeface="나눔고딕코딩"/>
-                <a:cs typeface="나눔고딕코딩"/>
+                <a:latin typeface="D2Coding"/>
+                <a:ea typeface="D2Coding"/>
+                <a:cs typeface="D2Coding"/>
               </a:rPr>
               <a:t>10</a:t>
             </a:r>
@@ -41437,9 +41437,9 @@
                 <a:solidFill>
                   <a:srgbClr val="7A869C"/>
                 </a:solidFill>
-                <a:latin typeface="나눔고딕코딩"/>
-                <a:ea typeface="나눔고딕코딩"/>
-                <a:cs typeface="나눔고딕코딩"/>
+                <a:latin typeface="D2Coding"/>
+                <a:ea typeface="D2Coding"/>
+                <a:cs typeface="D2Coding"/>
               </a:rPr>
               <a:t>11</a:t>
             </a:r>
@@ -41455,9 +41455,9 @@
                 <a:solidFill>
                   <a:srgbClr val="7A869C"/>
                 </a:solidFill>
-                <a:latin typeface="나눔고딕코딩"/>
-                <a:ea typeface="나눔고딕코딩"/>
-                <a:cs typeface="나눔고딕코딩"/>
+                <a:latin typeface="D2Coding"/>
+                <a:ea typeface="D2Coding"/>
+                <a:cs typeface="D2Coding"/>
               </a:rPr>
               <a:t>12</a:t>
             </a:r>
@@ -41473,9 +41473,9 @@
                 <a:solidFill>
                   <a:srgbClr val="7A869C"/>
                 </a:solidFill>
-                <a:latin typeface="나눔고딕코딩"/>
-                <a:ea typeface="나눔고딕코딩"/>
-                <a:cs typeface="나눔고딕코딩"/>
+                <a:latin typeface="D2Coding"/>
+                <a:ea typeface="D2Coding"/>
+                <a:cs typeface="D2Coding"/>
               </a:rPr>
               <a:t>13</a:t>
             </a:r>
@@ -41514,9 +41514,9 @@
                 <a:solidFill>
                   <a:srgbClr val="E6EAF2"/>
                 </a:solidFill>
-                <a:latin typeface="나눔고딕코딩"/>
-                <a:ea typeface="나눔고딕코딩"/>
-                <a:cs typeface="나눔고딕코딩"/>
+                <a:latin typeface="D2Coding"/>
+                <a:ea typeface="D2Coding"/>
+                <a:cs typeface="D2Coding"/>
               </a:rPr>
               <a:t>SELECT p.category,</a:t>
             </a:r>
@@ -41532,9 +41532,9 @@
                 <a:solidFill>
                   <a:srgbClr val="E6EAF2"/>
                 </a:solidFill>
-                <a:latin typeface="나눔고딕코딩"/>
-                <a:ea typeface="나눔고딕코딩"/>
-                <a:cs typeface="나눔고딕코딩"/>
+                <a:latin typeface="D2Coding"/>
+                <a:ea typeface="D2Coding"/>
+                <a:cs typeface="D2Coding"/>
               </a:rPr>
               <a:t>       SUM(i.qty * i.unit_price) AS 매출액,</a:t>
             </a:r>
@@ -41550,9 +41550,9 @@
                 <a:solidFill>
                   <a:srgbClr val="E6EAF2"/>
                 </a:solidFill>
-                <a:latin typeface="나눔고딕코딩"/>
-                <a:ea typeface="나눔고딕코딩"/>
-                <a:cs typeface="나눔고딕코딩"/>
+                <a:latin typeface="D2Coding"/>
+                <a:ea typeface="D2Coding"/>
+                <a:cs typeface="D2Coding"/>
               </a:rPr>
               <a:t>       ROUND(SUM(i.qty * i.unit_price) * 100</a:t>
             </a:r>
@@ -41568,9 +41568,9 @@
                 <a:solidFill>
                   <a:srgbClr val="E6EAF2"/>
                 </a:solidFill>
-                <a:latin typeface="나눔고딕코딩"/>
-                <a:ea typeface="나눔고딕코딩"/>
-                <a:cs typeface="나눔고딕코딩"/>
+                <a:latin typeface="D2Coding"/>
+                <a:ea typeface="D2Coding"/>
+                <a:cs typeface="D2Coding"/>
               </a:rPr>
               <a:t>             / (SELECT SUM(i2.qty * i2.unit_price)</a:t>
             </a:r>
@@ -41586,9 +41586,9 @@
                 <a:solidFill>
                   <a:srgbClr val="E6EAF2"/>
                 </a:solidFill>
-                <a:latin typeface="나눔고딕코딩"/>
-                <a:ea typeface="나눔고딕코딩"/>
-                <a:cs typeface="나눔고딕코딩"/>
+                <a:latin typeface="D2Coding"/>
+                <a:ea typeface="D2Coding"/>
+                <a:cs typeface="D2Coding"/>
               </a:rPr>
               <a:t>                FROM   orders o2</a:t>
             </a:r>
@@ -41604,9 +41604,9 @@
                 <a:solidFill>
                   <a:srgbClr val="E6EAF2"/>
                 </a:solidFill>
-                <a:latin typeface="나눔고딕코딩"/>
-                <a:ea typeface="나눔고딕코딩"/>
-                <a:cs typeface="나눔고딕코딩"/>
+                <a:latin typeface="D2Coding"/>
+                <a:ea typeface="D2Coding"/>
+                <a:cs typeface="D2Coding"/>
               </a:rPr>
               <a:t>                JOIN   order_items i2 ON o2.order_id = i2.order_id</a:t>
             </a:r>
@@ -41622,9 +41622,9 @@
                 <a:solidFill>
                   <a:srgbClr val="E6EAF2"/>
                 </a:solidFill>
-                <a:latin typeface="나눔고딕코딩"/>
-                <a:ea typeface="나눔고딕코딩"/>
-                <a:cs typeface="나눔고딕코딩"/>
+                <a:latin typeface="D2Coding"/>
+                <a:ea typeface="D2Coding"/>
+                <a:cs typeface="D2Coding"/>
               </a:rPr>
               <a:t>                WHERE  o2.status &lt;&gt; '취소'), 1) AS 비중</a:t>
             </a:r>
@@ -41640,9 +41640,9 @@
                 <a:solidFill>
                   <a:srgbClr val="E6EAF2"/>
                 </a:solidFill>
-                <a:latin typeface="나눔고딕코딩"/>
-                <a:ea typeface="나눔고딕코딩"/>
-                <a:cs typeface="나눔고딕코딩"/>
+                <a:latin typeface="D2Coding"/>
+                <a:ea typeface="D2Coding"/>
+                <a:cs typeface="D2Coding"/>
               </a:rPr>
               <a:t>FROM   products p</a:t>
             </a:r>
@@ -41658,9 +41658,9 @@
                 <a:solidFill>
                   <a:srgbClr val="E6EAF2"/>
                 </a:solidFill>
-                <a:latin typeface="나눔고딕코딩"/>
-                <a:ea typeface="나눔고딕코딩"/>
-                <a:cs typeface="나눔고딕코딩"/>
+                <a:latin typeface="D2Coding"/>
+                <a:ea typeface="D2Coding"/>
+                <a:cs typeface="D2Coding"/>
               </a:rPr>
               <a:t>JOIN   order_items i ON p.prod_id = i.prod_id</a:t>
             </a:r>
@@ -41676,9 +41676,9 @@
                 <a:solidFill>
                   <a:srgbClr val="E6EAF2"/>
                 </a:solidFill>
-                <a:latin typeface="나눔고딕코딩"/>
-                <a:ea typeface="나눔고딕코딩"/>
-                <a:cs typeface="나눔고딕코딩"/>
+                <a:latin typeface="D2Coding"/>
+                <a:ea typeface="D2Coding"/>
+                <a:cs typeface="D2Coding"/>
               </a:rPr>
               <a:t>JOIN   orders      o ON i.order_id = o.order_id</a:t>
             </a:r>
@@ -41694,9 +41694,9 @@
                 <a:solidFill>
                   <a:srgbClr val="E6EAF2"/>
                 </a:solidFill>
-                <a:latin typeface="나눔고딕코딩"/>
-                <a:ea typeface="나눔고딕코딩"/>
-                <a:cs typeface="나눔고딕코딩"/>
+                <a:latin typeface="D2Coding"/>
+                <a:ea typeface="D2Coding"/>
+                <a:cs typeface="D2Coding"/>
               </a:rPr>
               <a:t>WHERE  o.status &lt;&gt; '취소'</a:t>
             </a:r>
@@ -41712,9 +41712,9 @@
                 <a:solidFill>
                   <a:srgbClr val="E6EAF2"/>
                 </a:solidFill>
-                <a:latin typeface="나눔고딕코딩"/>
-                <a:ea typeface="나눔고딕코딩"/>
-                <a:cs typeface="나눔고딕코딩"/>
+                <a:latin typeface="D2Coding"/>
+                <a:ea typeface="D2Coding"/>
+                <a:cs typeface="D2Coding"/>
               </a:rPr>
               <a:t>GROUP  BY p.category</a:t>
             </a:r>
@@ -41730,9 +41730,9 @@
                 <a:solidFill>
                   <a:srgbClr val="E6EAF2"/>
                 </a:solidFill>
-                <a:latin typeface="나눔고딕코딩"/>
-                <a:ea typeface="나눔고딕코딩"/>
-                <a:cs typeface="나눔고딕코딩"/>
+                <a:latin typeface="D2Coding"/>
+                <a:ea typeface="D2Coding"/>
+                <a:cs typeface="D2Coding"/>
               </a:rPr>
               <a:t>ORDER  BY 매출액 DESC;</a:t>
             </a:r>
